--- a/assignment 3.pptx
+++ b/assignment 3.pptx
@@ -1,115 +1,22 @@
 
 <file path=ppt/presentation.xml><?xml version="1.0" encoding="utf-8"?>
-<p:presentation xmlns:a="http://schemas.openxmlformats.org/drawingml/2006/main" xmlns:r="http://schemas.openxmlformats.org/officeDocument/2006/relationships" xmlns:p="http://schemas.openxmlformats.org/presentationml/2006/main">
+<p:presentation xmlns:a="http://schemas.openxmlformats.org/drawingml/2006/main" xmlns:p="http://schemas.openxmlformats.org/presentationml/2006/main" xmlns:r="http://schemas.openxmlformats.org/officeDocument/2006/relationships" xmlns:p14="http://schemas.microsoft.com/office/powerpoint/2010/main" xmlns:p15="http://schemas.microsoft.com/office/powerpoint/2012/main" xmlns:mc="http://schemas.openxmlformats.org/markup-compatibility/2006">
   <p:sldMasterIdLst>
-    <p:sldMasterId id="2147483648" r:id="rId1"/>
+    <p:sldMasterId id="2147483648" r:id="rId2"/>
   </p:sldMasterIdLst>
   <p:sldIdLst>
-    <p:sldId id="256" r:id="rId2"/>
-    <p:sldId id="258" r:id="rId3"/>
+    <p:sldId id="256" r:id="rId3"/>
+    <p:sldId id="257" r:id="rId4"/>
+    <p:sldId id="258" r:id="rId5"/>
+    <p:sldId id="259" r:id="rId6"/>
   </p:sldIdLst>
   <p:sldSz cx="10080625" cy="5670550"/>
   <p:notesSz cx="7559675" cy="10691813"/>
-  <p:defaultTextStyle>
-    <a:defPPr>
-      <a:defRPr lang="en-US"/>
-    </a:defPPr>
-    <a:lvl1pPr marL="0" algn="l" defTabSz="914400" rtl="0" eaLnBrk="1" latinLnBrk="0" hangingPunct="1">
-      <a:defRPr sz="1800" kern="1200">
-        <a:solidFill>
-          <a:schemeClr val="tx1"/>
-        </a:solidFill>
-        <a:latin typeface="+mn-lt"/>
-        <a:ea typeface="+mn-ea"/>
-        <a:cs typeface="+mn-cs"/>
-      </a:defRPr>
-    </a:lvl1pPr>
-    <a:lvl2pPr marL="457200" algn="l" defTabSz="914400" rtl="0" eaLnBrk="1" latinLnBrk="0" hangingPunct="1">
-      <a:defRPr sz="1800" kern="1200">
-        <a:solidFill>
-          <a:schemeClr val="tx1"/>
-        </a:solidFill>
-        <a:latin typeface="+mn-lt"/>
-        <a:ea typeface="+mn-ea"/>
-        <a:cs typeface="+mn-cs"/>
-      </a:defRPr>
-    </a:lvl2pPr>
-    <a:lvl3pPr marL="914400" algn="l" defTabSz="914400" rtl="0" eaLnBrk="1" latinLnBrk="0" hangingPunct="1">
-      <a:defRPr sz="1800" kern="1200">
-        <a:solidFill>
-          <a:schemeClr val="tx1"/>
-        </a:solidFill>
-        <a:latin typeface="+mn-lt"/>
-        <a:ea typeface="+mn-ea"/>
-        <a:cs typeface="+mn-cs"/>
-      </a:defRPr>
-    </a:lvl3pPr>
-    <a:lvl4pPr marL="1371600" algn="l" defTabSz="914400" rtl="0" eaLnBrk="1" latinLnBrk="0" hangingPunct="1">
-      <a:defRPr sz="1800" kern="1200">
-        <a:solidFill>
-          <a:schemeClr val="tx1"/>
-        </a:solidFill>
-        <a:latin typeface="+mn-lt"/>
-        <a:ea typeface="+mn-ea"/>
-        <a:cs typeface="+mn-cs"/>
-      </a:defRPr>
-    </a:lvl4pPr>
-    <a:lvl5pPr marL="1828800" algn="l" defTabSz="914400" rtl="0" eaLnBrk="1" latinLnBrk="0" hangingPunct="1">
-      <a:defRPr sz="1800" kern="1200">
-        <a:solidFill>
-          <a:schemeClr val="tx1"/>
-        </a:solidFill>
-        <a:latin typeface="+mn-lt"/>
-        <a:ea typeface="+mn-ea"/>
-        <a:cs typeface="+mn-cs"/>
-      </a:defRPr>
-    </a:lvl5pPr>
-    <a:lvl6pPr marL="2286000" algn="l" defTabSz="914400" rtl="0" eaLnBrk="1" latinLnBrk="0" hangingPunct="1">
-      <a:defRPr sz="1800" kern="1200">
-        <a:solidFill>
-          <a:schemeClr val="tx1"/>
-        </a:solidFill>
-        <a:latin typeface="+mn-lt"/>
-        <a:ea typeface="+mn-ea"/>
-        <a:cs typeface="+mn-cs"/>
-      </a:defRPr>
-    </a:lvl6pPr>
-    <a:lvl7pPr marL="2743200" algn="l" defTabSz="914400" rtl="0" eaLnBrk="1" latinLnBrk="0" hangingPunct="1">
-      <a:defRPr sz="1800" kern="1200">
-        <a:solidFill>
-          <a:schemeClr val="tx1"/>
-        </a:solidFill>
-        <a:latin typeface="+mn-lt"/>
-        <a:ea typeface="+mn-ea"/>
-        <a:cs typeface="+mn-cs"/>
-      </a:defRPr>
-    </a:lvl7pPr>
-    <a:lvl8pPr marL="3200400" algn="l" defTabSz="914400" rtl="0" eaLnBrk="1" latinLnBrk="0" hangingPunct="1">
-      <a:defRPr sz="1800" kern="1200">
-        <a:solidFill>
-          <a:schemeClr val="tx1"/>
-        </a:solidFill>
-        <a:latin typeface="+mn-lt"/>
-        <a:ea typeface="+mn-ea"/>
-        <a:cs typeface="+mn-cs"/>
-      </a:defRPr>
-    </a:lvl8pPr>
-    <a:lvl9pPr marL="3657600" algn="l" defTabSz="914400" rtl="0" eaLnBrk="1" latinLnBrk="0" hangingPunct="1">
-      <a:defRPr sz="1800" kern="1200">
-        <a:solidFill>
-          <a:schemeClr val="tx1"/>
-        </a:solidFill>
-        <a:latin typeface="+mn-lt"/>
-        <a:ea typeface="+mn-ea"/>
-        <a:cs typeface="+mn-cs"/>
-      </a:defRPr>
-    </a:lvl9pPr>
-  </p:defaultTextStyle>
 </p:presentation>
 </file>
 
 <file path=ppt/slideLayouts/slideLayout1.xml><?xml version="1.0" encoding="utf-8"?>
-<p:sldLayout xmlns:a="http://schemas.openxmlformats.org/drawingml/2006/main" xmlns:r="http://schemas.openxmlformats.org/officeDocument/2006/relationships" xmlns:p="http://schemas.openxmlformats.org/presentationml/2006/main" type="blank" preserve="1">
+<p:sldLayout xmlns:a="http://schemas.openxmlformats.org/drawingml/2006/main" xmlns:p="http://schemas.openxmlformats.org/presentationml/2006/main" xmlns:r="http://schemas.openxmlformats.org/officeDocument/2006/relationships" xmlns:p14="http://schemas.microsoft.com/office/powerpoint/2010/main" xmlns:p15="http://schemas.microsoft.com/office/powerpoint/2012/main" xmlns:mc="http://schemas.openxmlformats.org/markup-compatibility/2006" type="blank" preserve="1">
   <p:cSld name="Blank Slide">
     <p:spTree>
       <p:nvGrpSpPr>
@@ -138,7 +45,6 @@
         <p:spPr/>
         <p:txBody>
           <a:bodyPr/>
-          <a:lstStyle/>
           <a:p>
             <a:r>
               <a:t>Footer</a:t>
@@ -159,12 +65,10 @@
         <p:spPr/>
         <p:txBody>
           <a:bodyPr/>
-          <a:lstStyle/>
-          <a:p>
-            <a:fld id="{45A600D0-78A7-4B1A-BA18-CADF9D7119E3}" type="slidenum">
-              <a:t>‹#›</a:t>
+          <a:p>
+            <a:fld id="{418A404E-AF5A-4673-816F-A2524FED7BF3}" type="slidenum">
+              <a:t>&lt;#&gt;</a:t>
             </a:fld>
-            <a:endParaRPr/>
           </a:p>
         </p:txBody>
       </p:sp>
@@ -181,22 +85,21 @@
         <p:spPr/>
         <p:txBody>
           <a:bodyPr/>
-          <a:lstStyle/>
-          <a:p>
-            <a:endParaRPr/>
+          <a:p>
+            <a:r>
+              <a:rPr lang="en-US"/>
+              <a:t/>
+            </a:r>
           </a:p>
         </p:txBody>
       </p:sp>
     </p:spTree>
   </p:cSld>
-  <p:clrMapOvr>
-    <a:masterClrMapping/>
-  </p:clrMapOvr>
 </p:sldLayout>
 </file>
 
 <file path=ppt/slideLayouts/slideLayout10.xml><?xml version="1.0" encoding="utf-8"?>
-<p:sldLayout xmlns:a="http://schemas.openxmlformats.org/drawingml/2006/main" xmlns:r="http://schemas.openxmlformats.org/officeDocument/2006/relationships" xmlns:p="http://schemas.openxmlformats.org/presentationml/2006/main" type="objOverTx" preserve="1">
+<p:sldLayout xmlns:a="http://schemas.openxmlformats.org/drawingml/2006/main" xmlns:p="http://schemas.openxmlformats.org/presentationml/2006/main" xmlns:r="http://schemas.openxmlformats.org/officeDocument/2006/relationships" xmlns:p14="http://schemas.microsoft.com/office/powerpoint/2010/main" xmlns:p15="http://schemas.microsoft.com/office/powerpoint/2012/main" xmlns:mc="http://schemas.openxmlformats.org/markup-compatibility/2006" type="objOverTx" preserve="1">
   <p:cSld name="Title, Content over Content">
     <p:spTree>
       <p:nvGrpSpPr>
@@ -236,50 +139,60 @@
           </a:ln>
         </p:spPr>
         <p:txBody>
-          <a:bodyPr lIns="0" tIns="0" rIns="0" bIns="0" anchor="ctr">
+          <a:bodyPr lIns="0" rIns="0" tIns="0" bIns="0" anchor="ctr">
             <a:noAutofit/>
           </a:bodyPr>
-          <a:lstStyle/>
-          <a:p>
-            <a:pPr algn="ctr">
+          <a:p>
+            <a:endParaRPr b="0" lang="en-US" sz="1800" spc="-1" strike="noStrike">
+              <a:solidFill>
+                <a:srgbClr val="000000"/>
+              </a:solidFill>
+              <a:latin typeface="Arial"/>
+            </a:endParaRPr>
+          </a:p>
+        </p:txBody>
+      </p:sp>
+      <p:sp>
+        <p:nvSpPr>
+          <p:cNvPr id="27" name="PlaceHolder 2"/>
+          <p:cNvSpPr>
+            <a:spLocks noGrp="1"/>
+          </p:cNvSpPr>
+          <p:nvPr>
+            <p:ph/>
+          </p:nvPr>
+        </p:nvSpPr>
+        <p:spPr>
+          <a:xfrm>
+            <a:off x="504000" y="1326600"/>
+            <a:ext cx="9072000" cy="1568520"/>
+          </a:xfrm>
+          <a:prstGeom prst="rect">
+            <a:avLst/>
+          </a:prstGeom>
+          <a:noFill/>
+          <a:ln w="0">
+            <a:noFill/>
+          </a:ln>
+        </p:spPr>
+        <p:txBody>
+          <a:bodyPr lIns="0" rIns="0" tIns="0" bIns="0" anchor="t">
+            <a:normAutofit/>
+          </a:bodyPr>
+          <a:p>
+            <a:pPr>
+              <a:lnSpc>
+                <a:spcPct val="90000"/>
+              </a:lnSpc>
+              <a:spcBef>
+                <a:spcPts val="1417"/>
+              </a:spcBef>
               <a:buNone/>
             </a:pPr>
-            <a:endParaRPr lang="en-US" sz="4400" b="0" strike="noStrike" spc="-1">
-              <a:latin typeface="Arial"/>
-            </a:endParaRPr>
-          </a:p>
-        </p:txBody>
-      </p:sp>
-      <p:sp>
-        <p:nvSpPr>
-          <p:cNvPr id="27" name="PlaceHolder 2"/>
-          <p:cNvSpPr>
-            <a:spLocks noGrp="1"/>
-          </p:cNvSpPr>
-          <p:nvPr>
-            <p:ph/>
-          </p:nvPr>
-        </p:nvSpPr>
-        <p:spPr>
-          <a:xfrm>
-            <a:off x="504000" y="1326600"/>
-            <a:ext cx="9072000" cy="1568520"/>
-          </a:xfrm>
-          <a:prstGeom prst="rect">
-            <a:avLst/>
-          </a:prstGeom>
-          <a:noFill/>
-          <a:ln w="0">
-            <a:noFill/>
-          </a:ln>
-        </p:spPr>
-        <p:txBody>
-          <a:bodyPr lIns="0" tIns="0" rIns="0" bIns="0" anchor="t">
-            <a:normAutofit/>
-          </a:bodyPr>
-          <a:lstStyle/>
-          <a:p>
-            <a:endParaRPr lang="en-US" sz="3200" b="0" strike="noStrike" spc="-1">
+            <a:endParaRPr b="0" lang="en-US" sz="2800" spc="-1" strike="noStrike">
+              <a:solidFill>
+                <a:srgbClr val="000000"/>
+              </a:solidFill>
               <a:latin typeface="Arial"/>
             </a:endParaRPr>
           </a:p>
@@ -309,12 +222,23 @@
           </a:ln>
         </p:spPr>
         <p:txBody>
-          <a:bodyPr lIns="0" tIns="0" rIns="0" bIns="0" anchor="t">
+          <a:bodyPr lIns="0" rIns="0" tIns="0" bIns="0" anchor="t">
             <a:normAutofit/>
           </a:bodyPr>
-          <a:lstStyle/>
-          <a:p>
-            <a:endParaRPr lang="en-US" sz="3200" b="0" strike="noStrike" spc="-1">
+          <a:p>
+            <a:pPr>
+              <a:lnSpc>
+                <a:spcPct val="90000"/>
+              </a:lnSpc>
+              <a:spcBef>
+                <a:spcPts val="1417"/>
+              </a:spcBef>
+              <a:buNone/>
+            </a:pPr>
+            <a:endParaRPr b="0" lang="en-US" sz="2800" spc="-1" strike="noStrike">
+              <a:solidFill>
+                <a:srgbClr val="000000"/>
+              </a:solidFill>
               <a:latin typeface="Arial"/>
             </a:endParaRPr>
           </a:p>
@@ -333,7 +257,6 @@
         <p:spPr/>
         <p:txBody>
           <a:bodyPr/>
-          <a:lstStyle/>
           <a:p>
             <a:r>
               <a:t>Footer</a:t>
@@ -354,12 +277,10 @@
         <p:spPr/>
         <p:txBody>
           <a:bodyPr/>
-          <a:lstStyle/>
-          <a:p>
-            <a:fld id="{BBD5887F-6620-4EE0-8F98-D60A05E198C5}" type="slidenum">
-              <a:t>‹#›</a:t>
+          <a:p>
+            <a:fld id="{BB2B1A72-524F-434F-B979-E656E5D012B3}" type="slidenum">
+              <a:t>&lt;#&gt;</a:t>
             </a:fld>
-            <a:endParaRPr/>
           </a:p>
         </p:txBody>
       </p:sp>
@@ -376,22 +297,21 @@
         <p:spPr/>
         <p:txBody>
           <a:bodyPr/>
-          <a:lstStyle/>
-          <a:p>
-            <a:endParaRPr/>
+          <a:p>
+            <a:r>
+              <a:rPr lang="en-US"/>
+              <a:t/>
+            </a:r>
           </a:p>
         </p:txBody>
       </p:sp>
     </p:spTree>
   </p:cSld>
-  <p:clrMapOvr>
-    <a:masterClrMapping/>
-  </p:clrMapOvr>
 </p:sldLayout>
 </file>
 
 <file path=ppt/slideLayouts/slideLayout11.xml><?xml version="1.0" encoding="utf-8"?>
-<p:sldLayout xmlns:a="http://schemas.openxmlformats.org/drawingml/2006/main" xmlns:r="http://schemas.openxmlformats.org/officeDocument/2006/relationships" xmlns:p="http://schemas.openxmlformats.org/presentationml/2006/main" type="fourObj" preserve="1">
+<p:sldLayout xmlns:a="http://schemas.openxmlformats.org/drawingml/2006/main" xmlns:p="http://schemas.openxmlformats.org/presentationml/2006/main" xmlns:r="http://schemas.openxmlformats.org/officeDocument/2006/relationships" xmlns:p14="http://schemas.microsoft.com/office/powerpoint/2010/main" xmlns:p15="http://schemas.microsoft.com/office/powerpoint/2012/main" xmlns:mc="http://schemas.openxmlformats.org/markup-compatibility/2006" type="fourObj" preserve="1">
   <p:cSld name="Title, 4 Content">
     <p:spTree>
       <p:nvGrpSpPr>
@@ -431,50 +351,60 @@
           </a:ln>
         </p:spPr>
         <p:txBody>
-          <a:bodyPr lIns="0" tIns="0" rIns="0" bIns="0" anchor="ctr">
+          <a:bodyPr lIns="0" rIns="0" tIns="0" bIns="0" anchor="ctr">
             <a:noAutofit/>
           </a:bodyPr>
-          <a:lstStyle/>
-          <a:p>
-            <a:pPr algn="ctr">
+          <a:p>
+            <a:endParaRPr b="0" lang="en-US" sz="1800" spc="-1" strike="noStrike">
+              <a:solidFill>
+                <a:srgbClr val="000000"/>
+              </a:solidFill>
+              <a:latin typeface="Arial"/>
+            </a:endParaRPr>
+          </a:p>
+        </p:txBody>
+      </p:sp>
+      <p:sp>
+        <p:nvSpPr>
+          <p:cNvPr id="30" name="PlaceHolder 2"/>
+          <p:cNvSpPr>
+            <a:spLocks noGrp="1"/>
+          </p:cNvSpPr>
+          <p:nvPr>
+            <p:ph/>
+          </p:nvPr>
+        </p:nvSpPr>
+        <p:spPr>
+          <a:xfrm>
+            <a:off x="504000" y="1326600"/>
+            <a:ext cx="4426920" cy="1568520"/>
+          </a:xfrm>
+          <a:prstGeom prst="rect">
+            <a:avLst/>
+          </a:prstGeom>
+          <a:noFill/>
+          <a:ln w="0">
+            <a:noFill/>
+          </a:ln>
+        </p:spPr>
+        <p:txBody>
+          <a:bodyPr lIns="0" rIns="0" tIns="0" bIns="0" anchor="t">
+            <a:normAutofit/>
+          </a:bodyPr>
+          <a:p>
+            <a:pPr>
+              <a:lnSpc>
+                <a:spcPct val="90000"/>
+              </a:lnSpc>
+              <a:spcBef>
+                <a:spcPts val="1417"/>
+              </a:spcBef>
               <a:buNone/>
             </a:pPr>
-            <a:endParaRPr lang="en-US" sz="4400" b="0" strike="noStrike" spc="-1">
-              <a:latin typeface="Arial"/>
-            </a:endParaRPr>
-          </a:p>
-        </p:txBody>
-      </p:sp>
-      <p:sp>
-        <p:nvSpPr>
-          <p:cNvPr id="30" name="PlaceHolder 2"/>
-          <p:cNvSpPr>
-            <a:spLocks noGrp="1"/>
-          </p:cNvSpPr>
-          <p:nvPr>
-            <p:ph/>
-          </p:nvPr>
-        </p:nvSpPr>
-        <p:spPr>
-          <a:xfrm>
-            <a:off x="504000" y="1326600"/>
-            <a:ext cx="4426920" cy="1568520"/>
-          </a:xfrm>
-          <a:prstGeom prst="rect">
-            <a:avLst/>
-          </a:prstGeom>
-          <a:noFill/>
-          <a:ln w="0">
-            <a:noFill/>
-          </a:ln>
-        </p:spPr>
-        <p:txBody>
-          <a:bodyPr lIns="0" tIns="0" rIns="0" bIns="0" anchor="t">
-            <a:normAutofit/>
-          </a:bodyPr>
-          <a:lstStyle/>
-          <a:p>
-            <a:endParaRPr lang="en-US" sz="3200" b="0" strike="noStrike" spc="-1">
+            <a:endParaRPr b="0" lang="en-US" sz="2800" spc="-1" strike="noStrike">
+              <a:solidFill>
+                <a:srgbClr val="000000"/>
+              </a:solidFill>
               <a:latin typeface="Arial"/>
             </a:endParaRPr>
           </a:p>
@@ -504,12 +434,23 @@
           </a:ln>
         </p:spPr>
         <p:txBody>
-          <a:bodyPr lIns="0" tIns="0" rIns="0" bIns="0" anchor="t">
+          <a:bodyPr lIns="0" rIns="0" tIns="0" bIns="0" anchor="t">
             <a:normAutofit/>
           </a:bodyPr>
-          <a:lstStyle/>
-          <a:p>
-            <a:endParaRPr lang="en-US" sz="3200" b="0" strike="noStrike" spc="-1">
+          <a:p>
+            <a:pPr>
+              <a:lnSpc>
+                <a:spcPct val="90000"/>
+              </a:lnSpc>
+              <a:spcBef>
+                <a:spcPts val="1417"/>
+              </a:spcBef>
+              <a:buNone/>
+            </a:pPr>
+            <a:endParaRPr b="0" lang="en-US" sz="2800" spc="-1" strike="noStrike">
+              <a:solidFill>
+                <a:srgbClr val="000000"/>
+              </a:solidFill>
               <a:latin typeface="Arial"/>
             </a:endParaRPr>
           </a:p>
@@ -539,12 +480,23 @@
           </a:ln>
         </p:spPr>
         <p:txBody>
-          <a:bodyPr lIns="0" tIns="0" rIns="0" bIns="0" anchor="t">
+          <a:bodyPr lIns="0" rIns="0" tIns="0" bIns="0" anchor="t">
             <a:normAutofit/>
           </a:bodyPr>
-          <a:lstStyle/>
-          <a:p>
-            <a:endParaRPr lang="en-US" sz="3200" b="0" strike="noStrike" spc="-1">
+          <a:p>
+            <a:pPr>
+              <a:lnSpc>
+                <a:spcPct val="90000"/>
+              </a:lnSpc>
+              <a:spcBef>
+                <a:spcPts val="1417"/>
+              </a:spcBef>
+              <a:buNone/>
+            </a:pPr>
+            <a:endParaRPr b="0" lang="en-US" sz="2800" spc="-1" strike="noStrike">
+              <a:solidFill>
+                <a:srgbClr val="000000"/>
+              </a:solidFill>
               <a:latin typeface="Arial"/>
             </a:endParaRPr>
           </a:p>
@@ -574,12 +526,23 @@
           </a:ln>
         </p:spPr>
         <p:txBody>
-          <a:bodyPr lIns="0" tIns="0" rIns="0" bIns="0" anchor="t">
+          <a:bodyPr lIns="0" rIns="0" tIns="0" bIns="0" anchor="t">
             <a:normAutofit/>
           </a:bodyPr>
-          <a:lstStyle/>
-          <a:p>
-            <a:endParaRPr lang="en-US" sz="3200" b="0" strike="noStrike" spc="-1">
+          <a:p>
+            <a:pPr>
+              <a:lnSpc>
+                <a:spcPct val="90000"/>
+              </a:lnSpc>
+              <a:spcBef>
+                <a:spcPts val="1417"/>
+              </a:spcBef>
+              <a:buNone/>
+            </a:pPr>
+            <a:endParaRPr b="0" lang="en-US" sz="2800" spc="-1" strike="noStrike">
+              <a:solidFill>
+                <a:srgbClr val="000000"/>
+              </a:solidFill>
               <a:latin typeface="Arial"/>
             </a:endParaRPr>
           </a:p>
@@ -598,7 +561,6 @@
         <p:spPr/>
         <p:txBody>
           <a:bodyPr/>
-          <a:lstStyle/>
           <a:p>
             <a:r>
               <a:t>Footer</a:t>
@@ -619,12 +581,10 @@
         <p:spPr/>
         <p:txBody>
           <a:bodyPr/>
-          <a:lstStyle/>
-          <a:p>
-            <a:fld id="{516B89D3-DF1C-4ED3-9269-09CAC2ED8153}" type="slidenum">
-              <a:t>‹#›</a:t>
+          <a:p>
+            <a:fld id="{925C271B-FB53-496D-9B34-5190916FC8C0}" type="slidenum">
+              <a:t>&lt;#&gt;</a:t>
             </a:fld>
-            <a:endParaRPr/>
           </a:p>
         </p:txBody>
       </p:sp>
@@ -641,22 +601,21 @@
         <p:spPr/>
         <p:txBody>
           <a:bodyPr/>
-          <a:lstStyle/>
-          <a:p>
-            <a:endParaRPr/>
+          <a:p>
+            <a:r>
+              <a:rPr lang="en-US"/>
+              <a:t/>
+            </a:r>
           </a:p>
         </p:txBody>
       </p:sp>
     </p:spTree>
   </p:cSld>
-  <p:clrMapOvr>
-    <a:masterClrMapping/>
-  </p:clrMapOvr>
 </p:sldLayout>
 </file>
 
 <file path=ppt/slideLayouts/slideLayout12.xml><?xml version="1.0" encoding="utf-8"?>
-<p:sldLayout xmlns:a="http://schemas.openxmlformats.org/drawingml/2006/main" xmlns:r="http://schemas.openxmlformats.org/officeDocument/2006/relationships" xmlns:p="http://schemas.openxmlformats.org/presentationml/2006/main" type="blank" preserve="1">
+<p:sldLayout xmlns:a="http://schemas.openxmlformats.org/drawingml/2006/main" xmlns:p="http://schemas.openxmlformats.org/presentationml/2006/main" xmlns:r="http://schemas.openxmlformats.org/officeDocument/2006/relationships" xmlns:p14="http://schemas.microsoft.com/office/powerpoint/2010/main" xmlns:p15="http://schemas.microsoft.com/office/powerpoint/2012/main" xmlns:mc="http://schemas.openxmlformats.org/markup-compatibility/2006" type="blank" preserve="1">
   <p:cSld name="Title, 6 Content">
     <p:spTree>
       <p:nvGrpSpPr>
@@ -696,50 +655,60 @@
           </a:ln>
         </p:spPr>
         <p:txBody>
-          <a:bodyPr lIns="0" tIns="0" rIns="0" bIns="0" anchor="ctr">
+          <a:bodyPr lIns="0" rIns="0" tIns="0" bIns="0" anchor="ctr">
             <a:noAutofit/>
           </a:bodyPr>
-          <a:lstStyle/>
-          <a:p>
-            <a:pPr algn="ctr">
+          <a:p>
+            <a:endParaRPr b="0" lang="en-US" sz="1800" spc="-1" strike="noStrike">
+              <a:solidFill>
+                <a:srgbClr val="000000"/>
+              </a:solidFill>
+              <a:latin typeface="Arial"/>
+            </a:endParaRPr>
+          </a:p>
+        </p:txBody>
+      </p:sp>
+      <p:sp>
+        <p:nvSpPr>
+          <p:cNvPr id="35" name="PlaceHolder 2"/>
+          <p:cNvSpPr>
+            <a:spLocks noGrp="1"/>
+          </p:cNvSpPr>
+          <p:nvPr>
+            <p:ph/>
+          </p:nvPr>
+        </p:nvSpPr>
+        <p:spPr>
+          <a:xfrm>
+            <a:off x="504000" y="1326600"/>
+            <a:ext cx="2921040" cy="1568520"/>
+          </a:xfrm>
+          <a:prstGeom prst="rect">
+            <a:avLst/>
+          </a:prstGeom>
+          <a:noFill/>
+          <a:ln w="0">
+            <a:noFill/>
+          </a:ln>
+        </p:spPr>
+        <p:txBody>
+          <a:bodyPr lIns="0" rIns="0" tIns="0" bIns="0" anchor="t">
+            <a:normAutofit/>
+          </a:bodyPr>
+          <a:p>
+            <a:pPr>
+              <a:lnSpc>
+                <a:spcPct val="90000"/>
+              </a:lnSpc>
+              <a:spcBef>
+                <a:spcPts val="1417"/>
+              </a:spcBef>
               <a:buNone/>
             </a:pPr>
-            <a:endParaRPr lang="en-US" sz="4400" b="0" strike="noStrike" spc="-1">
-              <a:latin typeface="Arial"/>
-            </a:endParaRPr>
-          </a:p>
-        </p:txBody>
-      </p:sp>
-      <p:sp>
-        <p:nvSpPr>
-          <p:cNvPr id="35" name="PlaceHolder 2"/>
-          <p:cNvSpPr>
-            <a:spLocks noGrp="1"/>
-          </p:cNvSpPr>
-          <p:nvPr>
-            <p:ph/>
-          </p:nvPr>
-        </p:nvSpPr>
-        <p:spPr>
-          <a:xfrm>
-            <a:off x="504000" y="1326600"/>
-            <a:ext cx="2921040" cy="1568520"/>
-          </a:xfrm>
-          <a:prstGeom prst="rect">
-            <a:avLst/>
-          </a:prstGeom>
-          <a:noFill/>
-          <a:ln w="0">
-            <a:noFill/>
-          </a:ln>
-        </p:spPr>
-        <p:txBody>
-          <a:bodyPr lIns="0" tIns="0" rIns="0" bIns="0" anchor="t">
-            <a:normAutofit/>
-          </a:bodyPr>
-          <a:lstStyle/>
-          <a:p>
-            <a:endParaRPr lang="en-US" sz="3200" b="0" strike="noStrike" spc="-1">
+            <a:endParaRPr b="0" lang="en-US" sz="2800" spc="-1" strike="noStrike">
+              <a:solidFill>
+                <a:srgbClr val="000000"/>
+              </a:solidFill>
               <a:latin typeface="Arial"/>
             </a:endParaRPr>
           </a:p>
@@ -769,12 +738,23 @@
           </a:ln>
         </p:spPr>
         <p:txBody>
-          <a:bodyPr lIns="0" tIns="0" rIns="0" bIns="0" anchor="t">
+          <a:bodyPr lIns="0" rIns="0" tIns="0" bIns="0" anchor="t">
             <a:normAutofit/>
           </a:bodyPr>
-          <a:lstStyle/>
-          <a:p>
-            <a:endParaRPr lang="en-US" sz="3200" b="0" strike="noStrike" spc="-1">
+          <a:p>
+            <a:pPr>
+              <a:lnSpc>
+                <a:spcPct val="90000"/>
+              </a:lnSpc>
+              <a:spcBef>
+                <a:spcPts val="1417"/>
+              </a:spcBef>
+              <a:buNone/>
+            </a:pPr>
+            <a:endParaRPr b="0" lang="en-US" sz="2800" spc="-1" strike="noStrike">
+              <a:solidFill>
+                <a:srgbClr val="000000"/>
+              </a:solidFill>
               <a:latin typeface="Arial"/>
             </a:endParaRPr>
           </a:p>
@@ -804,12 +784,23 @@
           </a:ln>
         </p:spPr>
         <p:txBody>
-          <a:bodyPr lIns="0" tIns="0" rIns="0" bIns="0" anchor="t">
+          <a:bodyPr lIns="0" rIns="0" tIns="0" bIns="0" anchor="t">
             <a:normAutofit/>
           </a:bodyPr>
-          <a:lstStyle/>
-          <a:p>
-            <a:endParaRPr lang="en-US" sz="3200" b="0" strike="noStrike" spc="-1">
+          <a:p>
+            <a:pPr>
+              <a:lnSpc>
+                <a:spcPct val="90000"/>
+              </a:lnSpc>
+              <a:spcBef>
+                <a:spcPts val="1417"/>
+              </a:spcBef>
+              <a:buNone/>
+            </a:pPr>
+            <a:endParaRPr b="0" lang="en-US" sz="2800" spc="-1" strike="noStrike">
+              <a:solidFill>
+                <a:srgbClr val="000000"/>
+              </a:solidFill>
               <a:latin typeface="Arial"/>
             </a:endParaRPr>
           </a:p>
@@ -839,12 +830,23 @@
           </a:ln>
         </p:spPr>
         <p:txBody>
-          <a:bodyPr lIns="0" tIns="0" rIns="0" bIns="0" anchor="t">
+          <a:bodyPr lIns="0" rIns="0" tIns="0" bIns="0" anchor="t">
             <a:normAutofit/>
           </a:bodyPr>
-          <a:lstStyle/>
-          <a:p>
-            <a:endParaRPr lang="en-US" sz="3200" b="0" strike="noStrike" spc="-1">
+          <a:p>
+            <a:pPr>
+              <a:lnSpc>
+                <a:spcPct val="90000"/>
+              </a:lnSpc>
+              <a:spcBef>
+                <a:spcPts val="1417"/>
+              </a:spcBef>
+              <a:buNone/>
+            </a:pPr>
+            <a:endParaRPr b="0" lang="en-US" sz="2800" spc="-1" strike="noStrike">
+              <a:solidFill>
+                <a:srgbClr val="000000"/>
+              </a:solidFill>
               <a:latin typeface="Arial"/>
             </a:endParaRPr>
           </a:p>
@@ -874,12 +876,23 @@
           </a:ln>
         </p:spPr>
         <p:txBody>
-          <a:bodyPr lIns="0" tIns="0" rIns="0" bIns="0" anchor="t">
+          <a:bodyPr lIns="0" rIns="0" tIns="0" bIns="0" anchor="t">
             <a:normAutofit/>
           </a:bodyPr>
-          <a:lstStyle/>
-          <a:p>
-            <a:endParaRPr lang="en-US" sz="3200" b="0" strike="noStrike" spc="-1">
+          <a:p>
+            <a:pPr>
+              <a:lnSpc>
+                <a:spcPct val="90000"/>
+              </a:lnSpc>
+              <a:spcBef>
+                <a:spcPts val="1417"/>
+              </a:spcBef>
+              <a:buNone/>
+            </a:pPr>
+            <a:endParaRPr b="0" lang="en-US" sz="2800" spc="-1" strike="noStrike">
+              <a:solidFill>
+                <a:srgbClr val="000000"/>
+              </a:solidFill>
               <a:latin typeface="Arial"/>
             </a:endParaRPr>
           </a:p>
@@ -909,12 +922,23 @@
           </a:ln>
         </p:spPr>
         <p:txBody>
-          <a:bodyPr lIns="0" tIns="0" rIns="0" bIns="0" anchor="t">
+          <a:bodyPr lIns="0" rIns="0" tIns="0" bIns="0" anchor="t">
             <a:normAutofit/>
           </a:bodyPr>
-          <a:lstStyle/>
-          <a:p>
-            <a:endParaRPr lang="en-US" sz="3200" b="0" strike="noStrike" spc="-1">
+          <a:p>
+            <a:pPr>
+              <a:lnSpc>
+                <a:spcPct val="90000"/>
+              </a:lnSpc>
+              <a:spcBef>
+                <a:spcPts val="1417"/>
+              </a:spcBef>
+              <a:buNone/>
+            </a:pPr>
+            <a:endParaRPr b="0" lang="en-US" sz="2800" spc="-1" strike="noStrike">
+              <a:solidFill>
+                <a:srgbClr val="000000"/>
+              </a:solidFill>
               <a:latin typeface="Arial"/>
             </a:endParaRPr>
           </a:p>
@@ -933,7 +957,6 @@
         <p:spPr/>
         <p:txBody>
           <a:bodyPr/>
-          <a:lstStyle/>
           <a:p>
             <a:r>
               <a:t>Footer</a:t>
@@ -954,12 +977,10 @@
         <p:spPr/>
         <p:txBody>
           <a:bodyPr/>
-          <a:lstStyle/>
-          <a:p>
-            <a:fld id="{2FCDD7C5-B431-45D0-9872-CB8266E1C1F9}" type="slidenum">
-              <a:t>‹#›</a:t>
+          <a:p>
+            <a:fld id="{0A850B0C-4F16-45B5-800D-3C247E27A266}" type="slidenum">
+              <a:t>&lt;#&gt;</a:t>
             </a:fld>
-            <a:endParaRPr/>
           </a:p>
         </p:txBody>
       </p:sp>
@@ -976,22 +997,21 @@
         <p:spPr/>
         <p:txBody>
           <a:bodyPr/>
-          <a:lstStyle/>
-          <a:p>
-            <a:endParaRPr/>
+          <a:p>
+            <a:r>
+              <a:rPr lang="en-US"/>
+              <a:t/>
+            </a:r>
           </a:p>
         </p:txBody>
       </p:sp>
     </p:spTree>
   </p:cSld>
-  <p:clrMapOvr>
-    <a:masterClrMapping/>
-  </p:clrMapOvr>
 </p:sldLayout>
 </file>
 
 <file path=ppt/slideLayouts/slideLayout2.xml><?xml version="1.0" encoding="utf-8"?>
-<p:sldLayout xmlns:a="http://schemas.openxmlformats.org/drawingml/2006/main" xmlns:r="http://schemas.openxmlformats.org/officeDocument/2006/relationships" xmlns:p="http://schemas.openxmlformats.org/presentationml/2006/main" type="tx" preserve="1">
+<p:sldLayout xmlns:a="http://schemas.openxmlformats.org/drawingml/2006/main" xmlns:p="http://schemas.openxmlformats.org/presentationml/2006/main" xmlns:r="http://schemas.openxmlformats.org/officeDocument/2006/relationships" xmlns:p14="http://schemas.microsoft.com/office/powerpoint/2010/main" xmlns:p15="http://schemas.microsoft.com/office/powerpoint/2012/main" xmlns:mc="http://schemas.openxmlformats.org/markup-compatibility/2006" type="tx" preserve="1">
   <p:cSld name="Title Slide">
     <p:spTree>
       <p:nvGrpSpPr>
@@ -1031,53 +1051,51 @@
           </a:ln>
         </p:spPr>
         <p:txBody>
-          <a:bodyPr lIns="0" tIns="0" rIns="0" bIns="0" anchor="ctr">
+          <a:bodyPr lIns="0" rIns="0" tIns="0" bIns="0" anchor="ctr">
             <a:noAutofit/>
           </a:bodyPr>
-          <a:lstStyle/>
+          <a:p>
+            <a:endParaRPr b="0" lang="en-US" sz="1800" spc="-1" strike="noStrike">
+              <a:solidFill>
+                <a:srgbClr val="000000"/>
+              </a:solidFill>
+              <a:latin typeface="Arial"/>
+            </a:endParaRPr>
+          </a:p>
+        </p:txBody>
+      </p:sp>
+      <p:sp>
+        <p:nvSpPr>
+          <p:cNvPr id="6" name="PlaceHolder 2"/>
+          <p:cNvSpPr>
+            <a:spLocks noGrp="1"/>
+          </p:cNvSpPr>
+          <p:nvPr>
+            <p:ph type="subTitle"/>
+          </p:nvPr>
+        </p:nvSpPr>
+        <p:spPr>
+          <a:xfrm>
+            <a:off x="504000" y="1326600"/>
+            <a:ext cx="9072000" cy="3288600"/>
+          </a:xfrm>
+          <a:prstGeom prst="rect">
+            <a:avLst/>
+          </a:prstGeom>
+          <a:noFill/>
+          <a:ln w="0">
+            <a:noFill/>
+          </a:ln>
+        </p:spPr>
+        <p:txBody>
+          <a:bodyPr lIns="0" rIns="0" tIns="0" bIns="0" anchor="ctr">
+            <a:noAutofit/>
+          </a:bodyPr>
           <a:p>
             <a:pPr algn="ctr">
               <a:buNone/>
             </a:pPr>
-            <a:endParaRPr lang="en-US" sz="4400" b="0" strike="noStrike" spc="-1">
-              <a:latin typeface="Arial"/>
-            </a:endParaRPr>
-          </a:p>
-        </p:txBody>
-      </p:sp>
-      <p:sp>
-        <p:nvSpPr>
-          <p:cNvPr id="6" name="PlaceHolder 2"/>
-          <p:cNvSpPr>
-            <a:spLocks noGrp="1"/>
-          </p:cNvSpPr>
-          <p:nvPr>
-            <p:ph type="subTitle"/>
-          </p:nvPr>
-        </p:nvSpPr>
-        <p:spPr>
-          <a:xfrm>
-            <a:off x="504000" y="1326600"/>
-            <a:ext cx="9072000" cy="3288600"/>
-          </a:xfrm>
-          <a:prstGeom prst="rect">
-            <a:avLst/>
-          </a:prstGeom>
-          <a:noFill/>
-          <a:ln w="0">
-            <a:noFill/>
-          </a:ln>
-        </p:spPr>
-        <p:txBody>
-          <a:bodyPr lIns="0" tIns="0" rIns="0" bIns="0" anchor="ctr">
-            <a:noAutofit/>
-          </a:bodyPr>
-          <a:lstStyle/>
-          <a:p>
-            <a:pPr algn="ctr">
-              <a:buNone/>
-            </a:pPr>
-            <a:endParaRPr lang="en-US" sz="3200" b="0" strike="noStrike" spc="-1">
+            <a:endParaRPr b="0" lang="en-US" sz="3200" spc="-1" strike="noStrike">
               <a:latin typeface="Arial"/>
             </a:endParaRPr>
           </a:p>
@@ -1096,7 +1114,6 @@
         <p:spPr/>
         <p:txBody>
           <a:bodyPr/>
-          <a:lstStyle/>
           <a:p>
             <a:r>
               <a:t>Footer</a:t>
@@ -1106,7 +1123,7 @@
       </p:sp>
       <p:sp>
         <p:nvSpPr>
-          <p:cNvPr id="2" name="PlaceHolder 4"/>
+          <p:cNvPr id="5" name="PlaceHolder 4"/>
           <p:cNvSpPr>
             <a:spLocks noGrp="1"/>
           </p:cNvSpPr>
@@ -1117,18 +1134,16 @@
         <p:spPr/>
         <p:txBody>
           <a:bodyPr/>
-          <a:lstStyle/>
-          <a:p>
-            <a:fld id="{E60FD64B-05A9-4CCE-B78F-4EF176AFDFEA}" type="slidenum">
-              <a:t>‹#›</a:t>
+          <a:p>
+            <a:fld id="{79142F8C-F9D8-493C-937B-ABD4C402D283}" type="slidenum">
+              <a:t>&lt;#&gt;</a:t>
             </a:fld>
-            <a:endParaRPr/>
-          </a:p>
-        </p:txBody>
-      </p:sp>
-      <p:sp>
-        <p:nvSpPr>
-          <p:cNvPr id="3" name="PlaceHolder 5"/>
+          </a:p>
+        </p:txBody>
+      </p:sp>
+      <p:sp>
+        <p:nvSpPr>
+          <p:cNvPr id="6" name="PlaceHolder 5"/>
           <p:cNvSpPr>
             <a:spLocks noGrp="1"/>
           </p:cNvSpPr>
@@ -1139,22 +1154,21 @@
         <p:spPr/>
         <p:txBody>
           <a:bodyPr/>
-          <a:lstStyle/>
-          <a:p>
-            <a:endParaRPr/>
+          <a:p>
+            <a:r>
+              <a:rPr lang="en-US"/>
+              <a:t/>
+            </a:r>
           </a:p>
         </p:txBody>
       </p:sp>
     </p:spTree>
   </p:cSld>
-  <p:clrMapOvr>
-    <a:masterClrMapping/>
-  </p:clrMapOvr>
 </p:sldLayout>
 </file>
 
 <file path=ppt/slideLayouts/slideLayout3.xml><?xml version="1.0" encoding="utf-8"?>
-<p:sldLayout xmlns:a="http://schemas.openxmlformats.org/drawingml/2006/main" xmlns:r="http://schemas.openxmlformats.org/officeDocument/2006/relationships" xmlns:p="http://schemas.openxmlformats.org/presentationml/2006/main" type="obj" preserve="1">
+<p:sldLayout xmlns:a="http://schemas.openxmlformats.org/drawingml/2006/main" xmlns:p="http://schemas.openxmlformats.org/presentationml/2006/main" xmlns:r="http://schemas.openxmlformats.org/officeDocument/2006/relationships" xmlns:p14="http://schemas.microsoft.com/office/powerpoint/2010/main" xmlns:p15="http://schemas.microsoft.com/office/powerpoint/2012/main" xmlns:mc="http://schemas.openxmlformats.org/markup-compatibility/2006" type="obj" preserve="1">
   <p:cSld name="Title, Content">
     <p:spTree>
       <p:nvGrpSpPr>
@@ -1194,50 +1208,60 @@
           </a:ln>
         </p:spPr>
         <p:txBody>
-          <a:bodyPr lIns="0" tIns="0" rIns="0" bIns="0" anchor="ctr">
+          <a:bodyPr lIns="0" rIns="0" tIns="0" bIns="0" anchor="ctr">
             <a:noAutofit/>
           </a:bodyPr>
-          <a:lstStyle/>
-          <a:p>
-            <a:pPr algn="ctr">
+          <a:p>
+            <a:endParaRPr b="0" lang="en-US" sz="1800" spc="-1" strike="noStrike">
+              <a:solidFill>
+                <a:srgbClr val="000000"/>
+              </a:solidFill>
+              <a:latin typeface="Arial"/>
+            </a:endParaRPr>
+          </a:p>
+        </p:txBody>
+      </p:sp>
+      <p:sp>
+        <p:nvSpPr>
+          <p:cNvPr id="8" name="PlaceHolder 2"/>
+          <p:cNvSpPr>
+            <a:spLocks noGrp="1"/>
+          </p:cNvSpPr>
+          <p:nvPr>
+            <p:ph/>
+          </p:nvPr>
+        </p:nvSpPr>
+        <p:spPr>
+          <a:xfrm>
+            <a:off x="504000" y="1326600"/>
+            <a:ext cx="9072000" cy="3288600"/>
+          </a:xfrm>
+          <a:prstGeom prst="rect">
+            <a:avLst/>
+          </a:prstGeom>
+          <a:noFill/>
+          <a:ln w="0">
+            <a:noFill/>
+          </a:ln>
+        </p:spPr>
+        <p:txBody>
+          <a:bodyPr lIns="0" rIns="0" tIns="0" bIns="0" anchor="t">
+            <a:normAutofit/>
+          </a:bodyPr>
+          <a:p>
+            <a:pPr>
+              <a:lnSpc>
+                <a:spcPct val="90000"/>
+              </a:lnSpc>
+              <a:spcBef>
+                <a:spcPts val="1417"/>
+              </a:spcBef>
               <a:buNone/>
             </a:pPr>
-            <a:endParaRPr lang="en-US" sz="4400" b="0" strike="noStrike" spc="-1">
-              <a:latin typeface="Arial"/>
-            </a:endParaRPr>
-          </a:p>
-        </p:txBody>
-      </p:sp>
-      <p:sp>
-        <p:nvSpPr>
-          <p:cNvPr id="8" name="PlaceHolder 2"/>
-          <p:cNvSpPr>
-            <a:spLocks noGrp="1"/>
-          </p:cNvSpPr>
-          <p:nvPr>
-            <p:ph/>
-          </p:nvPr>
-        </p:nvSpPr>
-        <p:spPr>
-          <a:xfrm>
-            <a:off x="504000" y="1326600"/>
-            <a:ext cx="9072000" cy="3288600"/>
-          </a:xfrm>
-          <a:prstGeom prst="rect">
-            <a:avLst/>
-          </a:prstGeom>
-          <a:noFill/>
-          <a:ln w="0">
-            <a:noFill/>
-          </a:ln>
-        </p:spPr>
-        <p:txBody>
-          <a:bodyPr lIns="0" tIns="0" rIns="0" bIns="0" anchor="t">
-            <a:normAutofit/>
-          </a:bodyPr>
-          <a:lstStyle/>
-          <a:p>
-            <a:endParaRPr lang="en-US" sz="3200" b="0" strike="noStrike" spc="-1">
+            <a:endParaRPr b="0" lang="en-US" sz="2800" spc="-1" strike="noStrike">
+              <a:solidFill>
+                <a:srgbClr val="000000"/>
+              </a:solidFill>
               <a:latin typeface="Arial"/>
             </a:endParaRPr>
           </a:p>
@@ -1256,7 +1280,6 @@
         <p:spPr/>
         <p:txBody>
           <a:bodyPr/>
-          <a:lstStyle/>
           <a:p>
             <a:r>
               <a:t>Footer</a:t>
@@ -1277,12 +1300,10 @@
         <p:spPr/>
         <p:txBody>
           <a:bodyPr/>
-          <a:lstStyle/>
-          <a:p>
-            <a:fld id="{211AB58B-079B-49E4-8D85-EF8575CC3897}" type="slidenum">
-              <a:t>‹#›</a:t>
+          <a:p>
+            <a:fld id="{9C9DDAA9-5752-436C-8268-FCC36EE28270}" type="slidenum">
+              <a:t>&lt;#&gt;</a:t>
             </a:fld>
-            <a:endParaRPr/>
           </a:p>
         </p:txBody>
       </p:sp>
@@ -1299,22 +1320,21 @@
         <p:spPr/>
         <p:txBody>
           <a:bodyPr/>
-          <a:lstStyle/>
-          <a:p>
-            <a:endParaRPr/>
+          <a:p>
+            <a:r>
+              <a:rPr lang="en-US"/>
+              <a:t/>
+            </a:r>
           </a:p>
         </p:txBody>
       </p:sp>
     </p:spTree>
   </p:cSld>
-  <p:clrMapOvr>
-    <a:masterClrMapping/>
-  </p:clrMapOvr>
 </p:sldLayout>
 </file>
 
 <file path=ppt/slideLayouts/slideLayout4.xml><?xml version="1.0" encoding="utf-8"?>
-<p:sldLayout xmlns:a="http://schemas.openxmlformats.org/drawingml/2006/main" xmlns:r="http://schemas.openxmlformats.org/officeDocument/2006/relationships" xmlns:p="http://schemas.openxmlformats.org/presentationml/2006/main" type="twoObj" preserve="1">
+<p:sldLayout xmlns:a="http://schemas.openxmlformats.org/drawingml/2006/main" xmlns:p="http://schemas.openxmlformats.org/presentationml/2006/main" xmlns:r="http://schemas.openxmlformats.org/officeDocument/2006/relationships" xmlns:p14="http://schemas.microsoft.com/office/powerpoint/2010/main" xmlns:p15="http://schemas.microsoft.com/office/powerpoint/2012/main" xmlns:mc="http://schemas.openxmlformats.org/markup-compatibility/2006" type="twoObj" preserve="1">
   <p:cSld name="Title, 2 Content">
     <p:spTree>
       <p:nvGrpSpPr>
@@ -1354,50 +1374,60 @@
           </a:ln>
         </p:spPr>
         <p:txBody>
-          <a:bodyPr lIns="0" tIns="0" rIns="0" bIns="0" anchor="ctr">
+          <a:bodyPr lIns="0" rIns="0" tIns="0" bIns="0" anchor="ctr">
             <a:noAutofit/>
           </a:bodyPr>
-          <a:lstStyle/>
-          <a:p>
-            <a:pPr algn="ctr">
+          <a:p>
+            <a:endParaRPr b="0" lang="en-US" sz="1800" spc="-1" strike="noStrike">
+              <a:solidFill>
+                <a:srgbClr val="000000"/>
+              </a:solidFill>
+              <a:latin typeface="Arial"/>
+            </a:endParaRPr>
+          </a:p>
+        </p:txBody>
+      </p:sp>
+      <p:sp>
+        <p:nvSpPr>
+          <p:cNvPr id="10" name="PlaceHolder 2"/>
+          <p:cNvSpPr>
+            <a:spLocks noGrp="1"/>
+          </p:cNvSpPr>
+          <p:nvPr>
+            <p:ph/>
+          </p:nvPr>
+        </p:nvSpPr>
+        <p:spPr>
+          <a:xfrm>
+            <a:off x="504000" y="1326600"/>
+            <a:ext cx="4426920" cy="3288600"/>
+          </a:xfrm>
+          <a:prstGeom prst="rect">
+            <a:avLst/>
+          </a:prstGeom>
+          <a:noFill/>
+          <a:ln w="0">
+            <a:noFill/>
+          </a:ln>
+        </p:spPr>
+        <p:txBody>
+          <a:bodyPr lIns="0" rIns="0" tIns="0" bIns="0" anchor="t">
+            <a:normAutofit/>
+          </a:bodyPr>
+          <a:p>
+            <a:pPr>
+              <a:lnSpc>
+                <a:spcPct val="90000"/>
+              </a:lnSpc>
+              <a:spcBef>
+                <a:spcPts val="1417"/>
+              </a:spcBef>
               <a:buNone/>
             </a:pPr>
-            <a:endParaRPr lang="en-US" sz="4400" b="0" strike="noStrike" spc="-1">
-              <a:latin typeface="Arial"/>
-            </a:endParaRPr>
-          </a:p>
-        </p:txBody>
-      </p:sp>
-      <p:sp>
-        <p:nvSpPr>
-          <p:cNvPr id="10" name="PlaceHolder 2"/>
-          <p:cNvSpPr>
-            <a:spLocks noGrp="1"/>
-          </p:cNvSpPr>
-          <p:nvPr>
-            <p:ph/>
-          </p:nvPr>
-        </p:nvSpPr>
-        <p:spPr>
-          <a:xfrm>
-            <a:off x="504000" y="1326600"/>
-            <a:ext cx="4426920" cy="3288600"/>
-          </a:xfrm>
-          <a:prstGeom prst="rect">
-            <a:avLst/>
-          </a:prstGeom>
-          <a:noFill/>
-          <a:ln w="0">
-            <a:noFill/>
-          </a:ln>
-        </p:spPr>
-        <p:txBody>
-          <a:bodyPr lIns="0" tIns="0" rIns="0" bIns="0" anchor="t">
-            <a:normAutofit/>
-          </a:bodyPr>
-          <a:lstStyle/>
-          <a:p>
-            <a:endParaRPr lang="en-US" sz="3200" b="0" strike="noStrike" spc="-1">
+            <a:endParaRPr b="0" lang="en-US" sz="2800" spc="-1" strike="noStrike">
+              <a:solidFill>
+                <a:srgbClr val="000000"/>
+              </a:solidFill>
               <a:latin typeface="Arial"/>
             </a:endParaRPr>
           </a:p>
@@ -1427,12 +1457,23 @@
           </a:ln>
         </p:spPr>
         <p:txBody>
-          <a:bodyPr lIns="0" tIns="0" rIns="0" bIns="0" anchor="t">
+          <a:bodyPr lIns="0" rIns="0" tIns="0" bIns="0" anchor="t">
             <a:normAutofit/>
           </a:bodyPr>
-          <a:lstStyle/>
-          <a:p>
-            <a:endParaRPr lang="en-US" sz="3200" b="0" strike="noStrike" spc="-1">
+          <a:p>
+            <a:pPr>
+              <a:lnSpc>
+                <a:spcPct val="90000"/>
+              </a:lnSpc>
+              <a:spcBef>
+                <a:spcPts val="1417"/>
+              </a:spcBef>
+              <a:buNone/>
+            </a:pPr>
+            <a:endParaRPr b="0" lang="en-US" sz="2800" spc="-1" strike="noStrike">
+              <a:solidFill>
+                <a:srgbClr val="000000"/>
+              </a:solidFill>
               <a:latin typeface="Arial"/>
             </a:endParaRPr>
           </a:p>
@@ -1451,7 +1492,6 @@
         <p:spPr/>
         <p:txBody>
           <a:bodyPr/>
-          <a:lstStyle/>
           <a:p>
             <a:r>
               <a:t>Footer</a:t>
@@ -1472,12 +1512,10 @@
         <p:spPr/>
         <p:txBody>
           <a:bodyPr/>
-          <a:lstStyle/>
-          <a:p>
-            <a:fld id="{3A368CE7-42F5-4310-84C6-6F6E819917BE}" type="slidenum">
-              <a:t>‹#›</a:t>
+          <a:p>
+            <a:fld id="{4E121933-0B71-4F5B-86B4-381696625B4F}" type="slidenum">
+              <a:t>&lt;#&gt;</a:t>
             </a:fld>
-            <a:endParaRPr/>
           </a:p>
         </p:txBody>
       </p:sp>
@@ -1494,22 +1532,21 @@
         <p:spPr/>
         <p:txBody>
           <a:bodyPr/>
-          <a:lstStyle/>
-          <a:p>
-            <a:endParaRPr/>
+          <a:p>
+            <a:r>
+              <a:rPr lang="en-US"/>
+              <a:t/>
+            </a:r>
           </a:p>
         </p:txBody>
       </p:sp>
     </p:spTree>
   </p:cSld>
-  <p:clrMapOvr>
-    <a:masterClrMapping/>
-  </p:clrMapOvr>
 </p:sldLayout>
 </file>
 
 <file path=ppt/slideLayouts/slideLayout5.xml><?xml version="1.0" encoding="utf-8"?>
-<p:sldLayout xmlns:a="http://schemas.openxmlformats.org/drawingml/2006/main" xmlns:r="http://schemas.openxmlformats.org/officeDocument/2006/relationships" xmlns:p="http://schemas.openxmlformats.org/presentationml/2006/main" type="titleOnly" preserve="1">
+<p:sldLayout xmlns:a="http://schemas.openxmlformats.org/drawingml/2006/main" xmlns:p="http://schemas.openxmlformats.org/presentationml/2006/main" xmlns:r="http://schemas.openxmlformats.org/officeDocument/2006/relationships" xmlns:p14="http://schemas.microsoft.com/office/powerpoint/2010/main" xmlns:p15="http://schemas.microsoft.com/office/powerpoint/2012/main" xmlns:mc="http://schemas.openxmlformats.org/markup-compatibility/2006" type="titleOnly" preserve="1">
   <p:cSld name="Title Only">
     <p:spTree>
       <p:nvGrpSpPr>
@@ -1549,15 +1586,14 @@
           </a:ln>
         </p:spPr>
         <p:txBody>
-          <a:bodyPr lIns="0" tIns="0" rIns="0" bIns="0" anchor="ctr">
+          <a:bodyPr lIns="0" rIns="0" tIns="0" bIns="0" anchor="ctr">
             <a:noAutofit/>
           </a:bodyPr>
-          <a:lstStyle/>
-          <a:p>
-            <a:pPr algn="ctr">
-              <a:buNone/>
-            </a:pPr>
-            <a:endParaRPr lang="en-US" sz="4400" b="0" strike="noStrike" spc="-1">
+          <a:p>
+            <a:endParaRPr b="0" lang="en-US" sz="1800" spc="-1" strike="noStrike">
+              <a:solidFill>
+                <a:srgbClr val="000000"/>
+              </a:solidFill>
               <a:latin typeface="Arial"/>
             </a:endParaRPr>
           </a:p>
@@ -1576,7 +1612,6 @@
         <p:spPr/>
         <p:txBody>
           <a:bodyPr/>
-          <a:lstStyle/>
           <a:p>
             <a:r>
               <a:t>Footer</a:t>
@@ -1597,12 +1632,10 @@
         <p:spPr/>
         <p:txBody>
           <a:bodyPr/>
-          <a:lstStyle/>
-          <a:p>
-            <a:fld id="{E61B6B96-CDE6-46C1-9F1D-98D955A0536F}" type="slidenum">
-              <a:t>‹#›</a:t>
+          <a:p>
+            <a:fld id="{130F3055-3977-48E8-A956-8706A500784D}" type="slidenum">
+              <a:t>&lt;#&gt;</a:t>
             </a:fld>
-            <a:endParaRPr/>
           </a:p>
         </p:txBody>
       </p:sp>
@@ -1619,22 +1652,21 @@
         <p:spPr/>
         <p:txBody>
           <a:bodyPr/>
-          <a:lstStyle/>
-          <a:p>
-            <a:endParaRPr/>
+          <a:p>
+            <a:r>
+              <a:rPr lang="en-US"/>
+              <a:t/>
+            </a:r>
           </a:p>
         </p:txBody>
       </p:sp>
     </p:spTree>
   </p:cSld>
-  <p:clrMapOvr>
-    <a:masterClrMapping/>
-  </p:clrMapOvr>
 </p:sldLayout>
 </file>
 
 <file path=ppt/slideLayouts/slideLayout6.xml><?xml version="1.0" encoding="utf-8"?>
-<p:sldLayout xmlns:a="http://schemas.openxmlformats.org/drawingml/2006/main" xmlns:r="http://schemas.openxmlformats.org/officeDocument/2006/relationships" xmlns:p="http://schemas.openxmlformats.org/presentationml/2006/main" type="objOnly" preserve="1">
+<p:sldLayout xmlns:a="http://schemas.openxmlformats.org/drawingml/2006/main" xmlns:p="http://schemas.openxmlformats.org/presentationml/2006/main" xmlns:r="http://schemas.openxmlformats.org/officeDocument/2006/relationships" xmlns:p14="http://schemas.microsoft.com/office/powerpoint/2010/main" xmlns:p15="http://schemas.microsoft.com/office/powerpoint/2012/main" xmlns:mc="http://schemas.openxmlformats.org/markup-compatibility/2006" type="objOnly" preserve="1">
   <p:cSld name="Centered Text">
     <p:spTree>
       <p:nvGrpSpPr>
@@ -1674,15 +1706,14 @@
           </a:ln>
         </p:spPr>
         <p:txBody>
-          <a:bodyPr lIns="0" tIns="0" rIns="0" bIns="0" anchor="ctr">
+          <a:bodyPr lIns="0" rIns="0" tIns="0" bIns="0" anchor="ctr">
             <a:noAutofit/>
           </a:bodyPr>
-          <a:lstStyle/>
           <a:p>
             <a:pPr algn="ctr">
               <a:buNone/>
             </a:pPr>
-            <a:endParaRPr lang="en-US" sz="3200" b="0" strike="noStrike" spc="-1">
+            <a:endParaRPr b="0" lang="en-US" sz="3200" spc="-1" strike="noStrike">
               <a:latin typeface="Arial"/>
             </a:endParaRPr>
           </a:p>
@@ -1701,7 +1732,6 @@
         <p:spPr/>
         <p:txBody>
           <a:bodyPr/>
-          <a:lstStyle/>
           <a:p>
             <a:r>
               <a:t>Footer</a:t>
@@ -1722,12 +1752,10 @@
         <p:spPr/>
         <p:txBody>
           <a:bodyPr/>
-          <a:lstStyle/>
-          <a:p>
-            <a:fld id="{258A6DA9-0DE5-4722-93F5-05436A90AECA}" type="slidenum">
-              <a:t>‹#›</a:t>
+          <a:p>
+            <a:fld id="{87DC7F14-8374-4DE6-B903-C7B2CD3E5E48}" type="slidenum">
+              <a:t>&lt;#&gt;</a:t>
             </a:fld>
-            <a:endParaRPr/>
           </a:p>
         </p:txBody>
       </p:sp>
@@ -1744,22 +1772,21 @@
         <p:spPr/>
         <p:txBody>
           <a:bodyPr/>
-          <a:lstStyle/>
-          <a:p>
-            <a:endParaRPr/>
+          <a:p>
+            <a:r>
+              <a:rPr lang="en-US"/>
+              <a:t/>
+            </a:r>
           </a:p>
         </p:txBody>
       </p:sp>
     </p:spTree>
   </p:cSld>
-  <p:clrMapOvr>
-    <a:masterClrMapping/>
-  </p:clrMapOvr>
 </p:sldLayout>
 </file>
 
 <file path=ppt/slideLayouts/slideLayout7.xml><?xml version="1.0" encoding="utf-8"?>
-<p:sldLayout xmlns:a="http://schemas.openxmlformats.org/drawingml/2006/main" xmlns:r="http://schemas.openxmlformats.org/officeDocument/2006/relationships" xmlns:p="http://schemas.openxmlformats.org/presentationml/2006/main" type="twoObjAndObj" preserve="1">
+<p:sldLayout xmlns:a="http://schemas.openxmlformats.org/drawingml/2006/main" xmlns:p="http://schemas.openxmlformats.org/presentationml/2006/main" xmlns:r="http://schemas.openxmlformats.org/officeDocument/2006/relationships" xmlns:p14="http://schemas.microsoft.com/office/powerpoint/2010/main" xmlns:p15="http://schemas.microsoft.com/office/powerpoint/2012/main" xmlns:mc="http://schemas.openxmlformats.org/markup-compatibility/2006" type="twoObjAndObj" preserve="1">
   <p:cSld name="Title, 2 Content and Content">
     <p:spTree>
       <p:nvGrpSpPr>
@@ -1799,50 +1826,60 @@
           </a:ln>
         </p:spPr>
         <p:txBody>
-          <a:bodyPr lIns="0" tIns="0" rIns="0" bIns="0" anchor="ctr">
+          <a:bodyPr lIns="0" rIns="0" tIns="0" bIns="0" anchor="ctr">
             <a:noAutofit/>
           </a:bodyPr>
-          <a:lstStyle/>
-          <a:p>
-            <a:pPr algn="ctr">
+          <a:p>
+            <a:endParaRPr b="0" lang="en-US" sz="1800" spc="-1" strike="noStrike">
+              <a:solidFill>
+                <a:srgbClr val="000000"/>
+              </a:solidFill>
+              <a:latin typeface="Arial"/>
+            </a:endParaRPr>
+          </a:p>
+        </p:txBody>
+      </p:sp>
+      <p:sp>
+        <p:nvSpPr>
+          <p:cNvPr id="15" name="PlaceHolder 2"/>
+          <p:cNvSpPr>
+            <a:spLocks noGrp="1"/>
+          </p:cNvSpPr>
+          <p:nvPr>
+            <p:ph/>
+          </p:nvPr>
+        </p:nvSpPr>
+        <p:spPr>
+          <a:xfrm>
+            <a:off x="504000" y="1326600"/>
+            <a:ext cx="4426920" cy="1568520"/>
+          </a:xfrm>
+          <a:prstGeom prst="rect">
+            <a:avLst/>
+          </a:prstGeom>
+          <a:noFill/>
+          <a:ln w="0">
+            <a:noFill/>
+          </a:ln>
+        </p:spPr>
+        <p:txBody>
+          <a:bodyPr lIns="0" rIns="0" tIns="0" bIns="0" anchor="t">
+            <a:normAutofit/>
+          </a:bodyPr>
+          <a:p>
+            <a:pPr>
+              <a:lnSpc>
+                <a:spcPct val="90000"/>
+              </a:lnSpc>
+              <a:spcBef>
+                <a:spcPts val="1417"/>
+              </a:spcBef>
               <a:buNone/>
             </a:pPr>
-            <a:endParaRPr lang="en-US" sz="4400" b="0" strike="noStrike" spc="-1">
-              <a:latin typeface="Arial"/>
-            </a:endParaRPr>
-          </a:p>
-        </p:txBody>
-      </p:sp>
-      <p:sp>
-        <p:nvSpPr>
-          <p:cNvPr id="15" name="PlaceHolder 2"/>
-          <p:cNvSpPr>
-            <a:spLocks noGrp="1"/>
-          </p:cNvSpPr>
-          <p:nvPr>
-            <p:ph/>
-          </p:nvPr>
-        </p:nvSpPr>
-        <p:spPr>
-          <a:xfrm>
-            <a:off x="504000" y="1326600"/>
-            <a:ext cx="4426920" cy="1568520"/>
-          </a:xfrm>
-          <a:prstGeom prst="rect">
-            <a:avLst/>
-          </a:prstGeom>
-          <a:noFill/>
-          <a:ln w="0">
-            <a:noFill/>
-          </a:ln>
-        </p:spPr>
-        <p:txBody>
-          <a:bodyPr lIns="0" tIns="0" rIns="0" bIns="0" anchor="t">
-            <a:normAutofit/>
-          </a:bodyPr>
-          <a:lstStyle/>
-          <a:p>
-            <a:endParaRPr lang="en-US" sz="3200" b="0" strike="noStrike" spc="-1">
+            <a:endParaRPr b="0" lang="en-US" sz="2800" spc="-1" strike="noStrike">
+              <a:solidFill>
+                <a:srgbClr val="000000"/>
+              </a:solidFill>
               <a:latin typeface="Arial"/>
             </a:endParaRPr>
           </a:p>
@@ -1872,12 +1909,23 @@
           </a:ln>
         </p:spPr>
         <p:txBody>
-          <a:bodyPr lIns="0" tIns="0" rIns="0" bIns="0" anchor="t">
+          <a:bodyPr lIns="0" rIns="0" tIns="0" bIns="0" anchor="t">
             <a:normAutofit/>
           </a:bodyPr>
-          <a:lstStyle/>
-          <a:p>
-            <a:endParaRPr lang="en-US" sz="3200" b="0" strike="noStrike" spc="-1">
+          <a:p>
+            <a:pPr>
+              <a:lnSpc>
+                <a:spcPct val="90000"/>
+              </a:lnSpc>
+              <a:spcBef>
+                <a:spcPts val="1417"/>
+              </a:spcBef>
+              <a:buNone/>
+            </a:pPr>
+            <a:endParaRPr b="0" lang="en-US" sz="2800" spc="-1" strike="noStrike">
+              <a:solidFill>
+                <a:srgbClr val="000000"/>
+              </a:solidFill>
               <a:latin typeface="Arial"/>
             </a:endParaRPr>
           </a:p>
@@ -1907,12 +1955,23 @@
           </a:ln>
         </p:spPr>
         <p:txBody>
-          <a:bodyPr lIns="0" tIns="0" rIns="0" bIns="0" anchor="t">
+          <a:bodyPr lIns="0" rIns="0" tIns="0" bIns="0" anchor="t">
             <a:normAutofit/>
           </a:bodyPr>
-          <a:lstStyle/>
-          <a:p>
-            <a:endParaRPr lang="en-US" sz="3200" b="0" strike="noStrike" spc="-1">
+          <a:p>
+            <a:pPr>
+              <a:lnSpc>
+                <a:spcPct val="90000"/>
+              </a:lnSpc>
+              <a:spcBef>
+                <a:spcPts val="1417"/>
+              </a:spcBef>
+              <a:buNone/>
+            </a:pPr>
+            <a:endParaRPr b="0" lang="en-US" sz="2800" spc="-1" strike="noStrike">
+              <a:solidFill>
+                <a:srgbClr val="000000"/>
+              </a:solidFill>
               <a:latin typeface="Arial"/>
             </a:endParaRPr>
           </a:p>
@@ -1931,7 +1990,6 @@
         <p:spPr/>
         <p:txBody>
           <a:bodyPr/>
-          <a:lstStyle/>
           <a:p>
             <a:r>
               <a:t>Footer</a:t>
@@ -1952,12 +2010,10 @@
         <p:spPr/>
         <p:txBody>
           <a:bodyPr/>
-          <a:lstStyle/>
-          <a:p>
-            <a:fld id="{173E42B5-CAC0-4D51-811D-77F015C19979}" type="slidenum">
-              <a:t>‹#›</a:t>
+          <a:p>
+            <a:fld id="{20F27EBA-5CEE-457B-9A78-0B7483559850}" type="slidenum">
+              <a:t>&lt;#&gt;</a:t>
             </a:fld>
-            <a:endParaRPr/>
           </a:p>
         </p:txBody>
       </p:sp>
@@ -1974,22 +2030,21 @@
         <p:spPr/>
         <p:txBody>
           <a:bodyPr/>
-          <a:lstStyle/>
-          <a:p>
-            <a:endParaRPr/>
+          <a:p>
+            <a:r>
+              <a:rPr lang="en-US"/>
+              <a:t/>
+            </a:r>
           </a:p>
         </p:txBody>
       </p:sp>
     </p:spTree>
   </p:cSld>
-  <p:clrMapOvr>
-    <a:masterClrMapping/>
-  </p:clrMapOvr>
 </p:sldLayout>
 </file>
 
 <file path=ppt/slideLayouts/slideLayout8.xml><?xml version="1.0" encoding="utf-8"?>
-<p:sldLayout xmlns:a="http://schemas.openxmlformats.org/drawingml/2006/main" xmlns:r="http://schemas.openxmlformats.org/officeDocument/2006/relationships" xmlns:p="http://schemas.openxmlformats.org/presentationml/2006/main" type="objAndTwoObj" preserve="1">
+<p:sldLayout xmlns:a="http://schemas.openxmlformats.org/drawingml/2006/main" xmlns:p="http://schemas.openxmlformats.org/presentationml/2006/main" xmlns:r="http://schemas.openxmlformats.org/officeDocument/2006/relationships" xmlns:p14="http://schemas.microsoft.com/office/powerpoint/2010/main" xmlns:p15="http://schemas.microsoft.com/office/powerpoint/2012/main" xmlns:mc="http://schemas.openxmlformats.org/markup-compatibility/2006" type="objAndTwoObj" preserve="1">
   <p:cSld name="Title Content and 2 Content">
     <p:spTree>
       <p:nvGrpSpPr>
@@ -2029,50 +2084,60 @@
           </a:ln>
         </p:spPr>
         <p:txBody>
-          <a:bodyPr lIns="0" tIns="0" rIns="0" bIns="0" anchor="ctr">
+          <a:bodyPr lIns="0" rIns="0" tIns="0" bIns="0" anchor="ctr">
             <a:noAutofit/>
           </a:bodyPr>
-          <a:lstStyle/>
-          <a:p>
-            <a:pPr algn="ctr">
+          <a:p>
+            <a:endParaRPr b="0" lang="en-US" sz="1800" spc="-1" strike="noStrike">
+              <a:solidFill>
+                <a:srgbClr val="000000"/>
+              </a:solidFill>
+              <a:latin typeface="Arial"/>
+            </a:endParaRPr>
+          </a:p>
+        </p:txBody>
+      </p:sp>
+      <p:sp>
+        <p:nvSpPr>
+          <p:cNvPr id="19" name="PlaceHolder 2"/>
+          <p:cNvSpPr>
+            <a:spLocks noGrp="1"/>
+          </p:cNvSpPr>
+          <p:nvPr>
+            <p:ph/>
+          </p:nvPr>
+        </p:nvSpPr>
+        <p:spPr>
+          <a:xfrm>
+            <a:off x="504000" y="1326600"/>
+            <a:ext cx="4426920" cy="3288600"/>
+          </a:xfrm>
+          <a:prstGeom prst="rect">
+            <a:avLst/>
+          </a:prstGeom>
+          <a:noFill/>
+          <a:ln w="0">
+            <a:noFill/>
+          </a:ln>
+        </p:spPr>
+        <p:txBody>
+          <a:bodyPr lIns="0" rIns="0" tIns="0" bIns="0" anchor="t">
+            <a:normAutofit/>
+          </a:bodyPr>
+          <a:p>
+            <a:pPr>
+              <a:lnSpc>
+                <a:spcPct val="90000"/>
+              </a:lnSpc>
+              <a:spcBef>
+                <a:spcPts val="1417"/>
+              </a:spcBef>
               <a:buNone/>
             </a:pPr>
-            <a:endParaRPr lang="en-US" sz="4400" b="0" strike="noStrike" spc="-1">
-              <a:latin typeface="Arial"/>
-            </a:endParaRPr>
-          </a:p>
-        </p:txBody>
-      </p:sp>
-      <p:sp>
-        <p:nvSpPr>
-          <p:cNvPr id="19" name="PlaceHolder 2"/>
-          <p:cNvSpPr>
-            <a:spLocks noGrp="1"/>
-          </p:cNvSpPr>
-          <p:nvPr>
-            <p:ph/>
-          </p:nvPr>
-        </p:nvSpPr>
-        <p:spPr>
-          <a:xfrm>
-            <a:off x="504000" y="1326600"/>
-            <a:ext cx="4426920" cy="3288600"/>
-          </a:xfrm>
-          <a:prstGeom prst="rect">
-            <a:avLst/>
-          </a:prstGeom>
-          <a:noFill/>
-          <a:ln w="0">
-            <a:noFill/>
-          </a:ln>
-        </p:spPr>
-        <p:txBody>
-          <a:bodyPr lIns="0" tIns="0" rIns="0" bIns="0" anchor="t">
-            <a:normAutofit/>
-          </a:bodyPr>
-          <a:lstStyle/>
-          <a:p>
-            <a:endParaRPr lang="en-US" sz="3200" b="0" strike="noStrike" spc="-1">
+            <a:endParaRPr b="0" lang="en-US" sz="2800" spc="-1" strike="noStrike">
+              <a:solidFill>
+                <a:srgbClr val="000000"/>
+              </a:solidFill>
               <a:latin typeface="Arial"/>
             </a:endParaRPr>
           </a:p>
@@ -2102,12 +2167,23 @@
           </a:ln>
         </p:spPr>
         <p:txBody>
-          <a:bodyPr lIns="0" tIns="0" rIns="0" bIns="0" anchor="t">
+          <a:bodyPr lIns="0" rIns="0" tIns="0" bIns="0" anchor="t">
             <a:normAutofit/>
           </a:bodyPr>
-          <a:lstStyle/>
-          <a:p>
-            <a:endParaRPr lang="en-US" sz="3200" b="0" strike="noStrike" spc="-1">
+          <a:p>
+            <a:pPr>
+              <a:lnSpc>
+                <a:spcPct val="90000"/>
+              </a:lnSpc>
+              <a:spcBef>
+                <a:spcPts val="1417"/>
+              </a:spcBef>
+              <a:buNone/>
+            </a:pPr>
+            <a:endParaRPr b="0" lang="en-US" sz="2800" spc="-1" strike="noStrike">
+              <a:solidFill>
+                <a:srgbClr val="000000"/>
+              </a:solidFill>
               <a:latin typeface="Arial"/>
             </a:endParaRPr>
           </a:p>
@@ -2137,12 +2213,23 @@
           </a:ln>
         </p:spPr>
         <p:txBody>
-          <a:bodyPr lIns="0" tIns="0" rIns="0" bIns="0" anchor="t">
+          <a:bodyPr lIns="0" rIns="0" tIns="0" bIns="0" anchor="t">
             <a:normAutofit/>
           </a:bodyPr>
-          <a:lstStyle/>
-          <a:p>
-            <a:endParaRPr lang="en-US" sz="3200" b="0" strike="noStrike" spc="-1">
+          <a:p>
+            <a:pPr>
+              <a:lnSpc>
+                <a:spcPct val="90000"/>
+              </a:lnSpc>
+              <a:spcBef>
+                <a:spcPts val="1417"/>
+              </a:spcBef>
+              <a:buNone/>
+            </a:pPr>
+            <a:endParaRPr b="0" lang="en-US" sz="2800" spc="-1" strike="noStrike">
+              <a:solidFill>
+                <a:srgbClr val="000000"/>
+              </a:solidFill>
               <a:latin typeface="Arial"/>
             </a:endParaRPr>
           </a:p>
@@ -2161,7 +2248,6 @@
         <p:spPr/>
         <p:txBody>
           <a:bodyPr/>
-          <a:lstStyle/>
           <a:p>
             <a:r>
               <a:t>Footer</a:t>
@@ -2182,12 +2268,10 @@
         <p:spPr/>
         <p:txBody>
           <a:bodyPr/>
-          <a:lstStyle/>
-          <a:p>
-            <a:fld id="{52780D17-F666-471B-B018-F2B7D07062AC}" type="slidenum">
-              <a:t>‹#›</a:t>
+          <a:p>
+            <a:fld id="{619D94CC-1827-484F-B46B-1B73926AA063}" type="slidenum">
+              <a:t>&lt;#&gt;</a:t>
             </a:fld>
-            <a:endParaRPr/>
           </a:p>
         </p:txBody>
       </p:sp>
@@ -2204,22 +2288,21 @@
         <p:spPr/>
         <p:txBody>
           <a:bodyPr/>
-          <a:lstStyle/>
-          <a:p>
-            <a:endParaRPr/>
+          <a:p>
+            <a:r>
+              <a:rPr lang="en-US"/>
+              <a:t/>
+            </a:r>
           </a:p>
         </p:txBody>
       </p:sp>
     </p:spTree>
   </p:cSld>
-  <p:clrMapOvr>
-    <a:masterClrMapping/>
-  </p:clrMapOvr>
 </p:sldLayout>
 </file>
 
 <file path=ppt/slideLayouts/slideLayout9.xml><?xml version="1.0" encoding="utf-8"?>
-<p:sldLayout xmlns:a="http://schemas.openxmlformats.org/drawingml/2006/main" xmlns:r="http://schemas.openxmlformats.org/officeDocument/2006/relationships" xmlns:p="http://schemas.openxmlformats.org/presentationml/2006/main" type="twoObjOverTx" preserve="1">
+<p:sldLayout xmlns:a="http://schemas.openxmlformats.org/drawingml/2006/main" xmlns:p="http://schemas.openxmlformats.org/presentationml/2006/main" xmlns:r="http://schemas.openxmlformats.org/officeDocument/2006/relationships" xmlns:p14="http://schemas.microsoft.com/office/powerpoint/2010/main" xmlns:p15="http://schemas.microsoft.com/office/powerpoint/2012/main" xmlns:mc="http://schemas.openxmlformats.org/markup-compatibility/2006" type="twoObjOverTx" preserve="1">
   <p:cSld name="Title, 2 Content over Content">
     <p:spTree>
       <p:nvGrpSpPr>
@@ -2259,50 +2342,60 @@
           </a:ln>
         </p:spPr>
         <p:txBody>
-          <a:bodyPr lIns="0" tIns="0" rIns="0" bIns="0" anchor="ctr">
+          <a:bodyPr lIns="0" rIns="0" tIns="0" bIns="0" anchor="ctr">
             <a:noAutofit/>
           </a:bodyPr>
-          <a:lstStyle/>
-          <a:p>
-            <a:pPr algn="ctr">
+          <a:p>
+            <a:endParaRPr b="0" lang="en-US" sz="1800" spc="-1" strike="noStrike">
+              <a:solidFill>
+                <a:srgbClr val="000000"/>
+              </a:solidFill>
+              <a:latin typeface="Arial"/>
+            </a:endParaRPr>
+          </a:p>
+        </p:txBody>
+      </p:sp>
+      <p:sp>
+        <p:nvSpPr>
+          <p:cNvPr id="23" name="PlaceHolder 2"/>
+          <p:cNvSpPr>
+            <a:spLocks noGrp="1"/>
+          </p:cNvSpPr>
+          <p:nvPr>
+            <p:ph/>
+          </p:nvPr>
+        </p:nvSpPr>
+        <p:spPr>
+          <a:xfrm>
+            <a:off x="504000" y="1326600"/>
+            <a:ext cx="4426920" cy="1568520"/>
+          </a:xfrm>
+          <a:prstGeom prst="rect">
+            <a:avLst/>
+          </a:prstGeom>
+          <a:noFill/>
+          <a:ln w="0">
+            <a:noFill/>
+          </a:ln>
+        </p:spPr>
+        <p:txBody>
+          <a:bodyPr lIns="0" rIns="0" tIns="0" bIns="0" anchor="t">
+            <a:normAutofit/>
+          </a:bodyPr>
+          <a:p>
+            <a:pPr>
+              <a:lnSpc>
+                <a:spcPct val="90000"/>
+              </a:lnSpc>
+              <a:spcBef>
+                <a:spcPts val="1417"/>
+              </a:spcBef>
               <a:buNone/>
             </a:pPr>
-            <a:endParaRPr lang="en-US" sz="4400" b="0" strike="noStrike" spc="-1">
-              <a:latin typeface="Arial"/>
-            </a:endParaRPr>
-          </a:p>
-        </p:txBody>
-      </p:sp>
-      <p:sp>
-        <p:nvSpPr>
-          <p:cNvPr id="23" name="PlaceHolder 2"/>
-          <p:cNvSpPr>
-            <a:spLocks noGrp="1"/>
-          </p:cNvSpPr>
-          <p:nvPr>
-            <p:ph/>
-          </p:nvPr>
-        </p:nvSpPr>
-        <p:spPr>
-          <a:xfrm>
-            <a:off x="504000" y="1326600"/>
-            <a:ext cx="4426920" cy="1568520"/>
-          </a:xfrm>
-          <a:prstGeom prst="rect">
-            <a:avLst/>
-          </a:prstGeom>
-          <a:noFill/>
-          <a:ln w="0">
-            <a:noFill/>
-          </a:ln>
-        </p:spPr>
-        <p:txBody>
-          <a:bodyPr lIns="0" tIns="0" rIns="0" bIns="0" anchor="t">
-            <a:normAutofit/>
-          </a:bodyPr>
-          <a:lstStyle/>
-          <a:p>
-            <a:endParaRPr lang="en-US" sz="3200" b="0" strike="noStrike" spc="-1">
+            <a:endParaRPr b="0" lang="en-US" sz="2800" spc="-1" strike="noStrike">
+              <a:solidFill>
+                <a:srgbClr val="000000"/>
+              </a:solidFill>
               <a:latin typeface="Arial"/>
             </a:endParaRPr>
           </a:p>
@@ -2332,12 +2425,23 @@
           </a:ln>
         </p:spPr>
         <p:txBody>
-          <a:bodyPr lIns="0" tIns="0" rIns="0" bIns="0" anchor="t">
+          <a:bodyPr lIns="0" rIns="0" tIns="0" bIns="0" anchor="t">
             <a:normAutofit/>
           </a:bodyPr>
-          <a:lstStyle/>
-          <a:p>
-            <a:endParaRPr lang="en-US" sz="3200" b="0" strike="noStrike" spc="-1">
+          <a:p>
+            <a:pPr>
+              <a:lnSpc>
+                <a:spcPct val="90000"/>
+              </a:lnSpc>
+              <a:spcBef>
+                <a:spcPts val="1417"/>
+              </a:spcBef>
+              <a:buNone/>
+            </a:pPr>
+            <a:endParaRPr b="0" lang="en-US" sz="2800" spc="-1" strike="noStrike">
+              <a:solidFill>
+                <a:srgbClr val="000000"/>
+              </a:solidFill>
               <a:latin typeface="Arial"/>
             </a:endParaRPr>
           </a:p>
@@ -2367,12 +2471,23 @@
           </a:ln>
         </p:spPr>
         <p:txBody>
-          <a:bodyPr lIns="0" tIns="0" rIns="0" bIns="0" anchor="t">
+          <a:bodyPr lIns="0" rIns="0" tIns="0" bIns="0" anchor="t">
             <a:normAutofit/>
           </a:bodyPr>
-          <a:lstStyle/>
-          <a:p>
-            <a:endParaRPr lang="en-US" sz="3200" b="0" strike="noStrike" spc="-1">
+          <a:p>
+            <a:pPr>
+              <a:lnSpc>
+                <a:spcPct val="90000"/>
+              </a:lnSpc>
+              <a:spcBef>
+                <a:spcPts val="1417"/>
+              </a:spcBef>
+              <a:buNone/>
+            </a:pPr>
+            <a:endParaRPr b="0" lang="en-US" sz="2800" spc="-1" strike="noStrike">
+              <a:solidFill>
+                <a:srgbClr val="000000"/>
+              </a:solidFill>
               <a:latin typeface="Arial"/>
             </a:endParaRPr>
           </a:p>
@@ -2391,7 +2506,6 @@
         <p:spPr/>
         <p:txBody>
           <a:bodyPr/>
-          <a:lstStyle/>
           <a:p>
             <a:r>
               <a:t>Footer</a:t>
@@ -2412,12 +2526,10 @@
         <p:spPr/>
         <p:txBody>
           <a:bodyPr/>
-          <a:lstStyle/>
-          <a:p>
-            <a:fld id="{CDA9CB68-23C4-4C90-8508-01184EC26174}" type="slidenum">
-              <a:t>‹#›</a:t>
+          <a:p>
+            <a:fld id="{16F50B40-9A0A-4BEA-8820-52B894A8EA39}" type="slidenum">
+              <a:t>&lt;#&gt;</a:t>
             </a:fld>
-            <a:endParaRPr/>
           </a:p>
         </p:txBody>
       </p:sp>
@@ -2434,27 +2546,28 @@
         <p:spPr/>
         <p:txBody>
           <a:bodyPr/>
-          <a:lstStyle/>
-          <a:p>
-            <a:endParaRPr/>
+          <a:p>
+            <a:r>
+              <a:rPr lang="en-US"/>
+              <a:t/>
+            </a:r>
           </a:p>
         </p:txBody>
       </p:sp>
     </p:spTree>
   </p:cSld>
-  <p:clrMapOvr>
-    <a:masterClrMapping/>
-  </p:clrMapOvr>
 </p:sldLayout>
 </file>
 
 <file path=ppt/slideMasters/slideMaster1.xml><?xml version="1.0" encoding="utf-8"?>
-<p:sldMaster xmlns:a="http://schemas.openxmlformats.org/drawingml/2006/main" xmlns:r="http://schemas.openxmlformats.org/officeDocument/2006/relationships" xmlns:p="http://schemas.openxmlformats.org/presentationml/2006/main">
+<p:sldMaster xmlns:a="http://schemas.openxmlformats.org/drawingml/2006/main" xmlns:p="http://schemas.openxmlformats.org/presentationml/2006/main" xmlns:r="http://schemas.openxmlformats.org/officeDocument/2006/relationships" xmlns:p14="http://schemas.microsoft.com/office/powerpoint/2010/main" xmlns:p15="http://schemas.microsoft.com/office/powerpoint/2012/main" xmlns:mc="http://schemas.openxmlformats.org/markup-compatibility/2006">
   <p:cSld>
     <p:bg>
-      <p:bgRef idx="1001">
-        <a:schemeClr val="bg1"/>
-      </p:bgRef>
+      <p:bgPr>
+        <a:solidFill>
+          <a:srgbClr val="ffffff"/>
+        </a:solidFill>
+      </p:bgPr>
     </p:bg>
     <p:spTree>
       <p:nvGrpSpPr>
@@ -2472,7 +2585,7 @@
       </p:grpSpPr>
       <p:sp>
         <p:nvSpPr>
-          <p:cNvPr id="5" name="PlaceHolder 1"/>
+          <p:cNvPr id="0" name="PlaceHolder 1"/>
           <p:cNvSpPr>
             <a:spLocks noGrp="1"/>
           </p:cNvSpPr>
@@ -2483,18 +2596,18 @@
         <p:spPr>
           <a:xfrm>
             <a:off x="3447360" y="5165280"/>
-            <a:ext cx="3194640" cy="390240"/>
-          </a:xfrm>
-          <a:prstGeom prst="rect">
-            <a:avLst/>
-          </a:prstGeom>
-          <a:noFill/>
-          <a:ln w="0">
-            <a:noFill/>
-          </a:ln>
-        </p:spPr>
-        <p:txBody>
-          <a:bodyPr lIns="0" tIns="0" rIns="0" bIns="0" anchor="t">
+            <a:ext cx="3194280" cy="389880"/>
+          </a:xfrm>
+          <a:prstGeom prst="rect">
+            <a:avLst/>
+          </a:prstGeom>
+          <a:noFill/>
+          <a:ln w="0">
+            <a:noFill/>
+          </a:ln>
+        </p:spPr>
+        <p:txBody>
+          <a:bodyPr lIns="0" rIns="0" tIns="0" bIns="0" anchor="t">
             <a:noAutofit/>
           </a:bodyPr>
           <a:lstStyle>
@@ -2503,8 +2616,12 @@
                 <a:spcPct val="100000"/>
               </a:lnSpc>
               <a:buNone/>
-              <a:defRPr lang="en-US" sz="1400" b="0" strike="noStrike" spc="-1">
+              <a:defRPr b="0" lang="en-US" sz="1400" spc="-1" strike="noStrike">
+                <a:solidFill>
+                  <a:srgbClr val="000000"/>
+                </a:solidFill>
                 <a:latin typeface="Times New Roman"/>
+                <a:ea typeface="DejaVu Sans"/>
               </a:defRPr>
             </a:lvl1pPr>
           </a:lstStyle>
@@ -2516,17 +2633,24 @@
               <a:buNone/>
             </a:pPr>
             <a:r>
-              <a:rPr lang="en-US" sz="1400" b="0" strike="noStrike" spc="-1">
+              <a:rPr b="0" lang="en-US" sz="1400" spc="-1" strike="noStrike">
+                <a:solidFill>
+                  <a:srgbClr val="000000"/>
+                </a:solidFill>
                 <a:latin typeface="Times New Roman"/>
+                <a:ea typeface="DejaVu Sans"/>
               </a:rPr>
               <a:t>&lt;footer&gt;</a:t>
             </a:r>
-          </a:p>
-        </p:txBody>
-      </p:sp>
-      <p:sp>
-        <p:nvSpPr>
-          <p:cNvPr id="6" name="PlaceHolder 2"/>
+            <a:endParaRPr b="0" lang="en-US" sz="1400" spc="-1" strike="noStrike">
+              <a:latin typeface="Times New Roman"/>
+            </a:endParaRPr>
+          </a:p>
+        </p:txBody>
+      </p:sp>
+      <p:sp>
+        <p:nvSpPr>
+          <p:cNvPr id="1" name="PlaceHolder 2"/>
           <p:cNvSpPr>
             <a:spLocks noGrp="1"/>
           </p:cNvSpPr>
@@ -2537,18 +2661,18 @@
         <p:spPr>
           <a:xfrm>
             <a:off x="7227360" y="5165280"/>
-            <a:ext cx="2347920" cy="390240"/>
-          </a:xfrm>
-          <a:prstGeom prst="rect">
-            <a:avLst/>
-          </a:prstGeom>
-          <a:noFill/>
-          <a:ln w="0">
-            <a:noFill/>
-          </a:ln>
-        </p:spPr>
-        <p:txBody>
-          <a:bodyPr lIns="0" tIns="0" rIns="0" bIns="0" anchor="t">
+            <a:ext cx="2347560" cy="389880"/>
+          </a:xfrm>
+          <a:prstGeom prst="rect">
+            <a:avLst/>
+          </a:prstGeom>
+          <a:noFill/>
+          <a:ln w="0">
+            <a:noFill/>
+          </a:ln>
+        </p:spPr>
+        <p:txBody>
+          <a:bodyPr lIns="0" rIns="0" tIns="0" bIns="0" anchor="t">
             <a:noAutofit/>
           </a:bodyPr>
           <a:lstStyle>
@@ -2557,8 +2681,12 @@
                 <a:spcPct val="100000"/>
               </a:lnSpc>
               <a:buNone/>
-              <a:defRPr lang="en-US" sz="1400" b="0" strike="noStrike" spc="-1">
+              <a:defRPr b="0" lang="en-US" sz="1400" spc="-1" strike="noStrike">
+                <a:solidFill>
+                  <a:srgbClr val="000000"/>
+                </a:solidFill>
                 <a:latin typeface="Times New Roman"/>
+                <a:ea typeface="DejaVu Sans"/>
               </a:defRPr>
             </a:lvl1pPr>
           </a:lstStyle>
@@ -2569,13 +2697,17 @@
               </a:lnSpc>
               <a:buNone/>
             </a:pPr>
-            <a:fld id="{C8E85C2B-A329-40D2-824E-30763B7974A0}" type="slidenum">
-              <a:rPr lang="en-US" sz="1400" b="0" strike="noStrike" spc="-1">
+            <a:fld id="{EB88C368-9C8E-4649-AF8C-C29F5710276D}" type="slidenum">
+              <a:rPr b="0" lang="en-US" sz="1400" spc="-1" strike="noStrike">
+                <a:solidFill>
+                  <a:srgbClr val="000000"/>
+                </a:solidFill>
                 <a:latin typeface="Times New Roman"/>
+                <a:ea typeface="DejaVu Sans"/>
               </a:rPr>
-              <a:t>‹#›</a:t>
+              <a:t>&lt;number&gt;</a:t>
             </a:fld>
-            <a:endParaRPr lang="en-US" sz="1400" b="0" strike="noStrike" spc="-1">
+            <a:endParaRPr b="0" lang="en-US" sz="1400" spc="-1" strike="noStrike">
               <a:latin typeface="Times New Roman"/>
             </a:endParaRPr>
           </a:p>
@@ -2594,34 +2726,37 @@
         <p:spPr>
           <a:xfrm>
             <a:off x="504000" y="5165280"/>
-            <a:ext cx="2347920" cy="390240"/>
-          </a:xfrm>
-          <a:prstGeom prst="rect">
-            <a:avLst/>
-          </a:prstGeom>
-          <a:noFill/>
-          <a:ln w="0">
-            <a:noFill/>
-          </a:ln>
-        </p:spPr>
-        <p:txBody>
-          <a:bodyPr lIns="0" tIns="0" rIns="0" bIns="0" anchor="t">
+            <a:ext cx="2347560" cy="389880"/>
+          </a:xfrm>
+          <a:prstGeom prst="rect">
+            <a:avLst/>
+          </a:prstGeom>
+          <a:noFill/>
+          <a:ln w="0">
+            <a:noFill/>
+          </a:ln>
+        </p:spPr>
+        <p:txBody>
+          <a:bodyPr lIns="0" rIns="0" tIns="0" bIns="0" anchor="t">
             <a:noAutofit/>
           </a:bodyPr>
           <a:lstStyle>
             <a:lvl1pPr>
-              <a:defRPr lang="en-US" sz="1400" b="0" strike="noStrike" spc="-1">
+              <a:defRPr b="0" lang="en-US" sz="1400" spc="-1" strike="noStrike">
                 <a:latin typeface="Times New Roman"/>
               </a:defRPr>
             </a:lvl1pPr>
           </a:lstStyle>
           <a:p>
             <a:r>
-              <a:rPr lang="en-US" sz="1400" b="0" strike="noStrike" spc="-1">
+              <a:rPr b="0" lang="en-US" sz="1400" spc="-1" strike="noStrike">
                 <a:latin typeface="Times New Roman"/>
               </a:rPr>
               <a:t>&lt;date/time&gt;</a:t>
             </a:r>
+            <a:endParaRPr b="0" lang="en-US" sz="1400" spc="-1" strike="noStrike">
+              <a:latin typeface="Times New Roman"/>
+            </a:endParaRPr>
           </a:p>
         </p:txBody>
       </p:sp>
@@ -2649,20 +2784,25 @@
           </a:ln>
         </p:spPr>
         <p:txBody>
-          <a:bodyPr lIns="0" tIns="0" rIns="0" bIns="0" anchor="ctr">
+          <a:bodyPr lIns="0" rIns="0" tIns="0" bIns="0" anchor="ctr">
             <a:noAutofit/>
           </a:bodyPr>
-          <a:lstStyle/>
-          <a:p>
-            <a:pPr algn="ctr">
-              <a:buNone/>
-            </a:pPr>
-            <a:r>
-              <a:rPr lang="en-US" sz="4400" b="0" strike="noStrike" spc="-1">
+          <a:p>
+            <a:r>
+              <a:rPr b="0" lang="en-US" sz="1800" spc="-1" strike="noStrike">
+                <a:solidFill>
+                  <a:srgbClr val="000000"/>
+                </a:solidFill>
                 <a:latin typeface="Arial"/>
               </a:rPr>
               <a:t>Click to edit the title text format</a:t>
             </a:r>
+            <a:endParaRPr b="0" lang="en-US" sz="1800" spc="-1" strike="noStrike">
+              <a:solidFill>
+                <a:srgbClr val="000000"/>
+              </a:solidFill>
+              <a:latin typeface="Arial"/>
+            </a:endParaRPr>
           </a:p>
         </p:txBody>
       </p:sp>
@@ -2690,12 +2830,14 @@
           </a:ln>
         </p:spPr>
         <p:txBody>
-          <a:bodyPr lIns="0" tIns="0" rIns="0" bIns="0" anchor="t">
+          <a:bodyPr lIns="0" rIns="0" tIns="0" bIns="0" anchor="t">
             <a:normAutofit/>
           </a:bodyPr>
-          <a:lstStyle/>
           <a:p>
             <a:pPr marL="432000" indent="-324000">
+              <a:lnSpc>
+                <a:spcPct val="90000"/>
+              </a:lnSpc>
               <a:spcBef>
                 <a:spcPts val="1417"/>
               </a:spcBef>
@@ -2707,14 +2849,26 @@
               <a:buChar char=""/>
             </a:pPr>
             <a:r>
-              <a:rPr lang="en-US" sz="3200" b="0" strike="noStrike" spc="-1">
+              <a:rPr b="0" lang="en-US" sz="2800" spc="-1" strike="noStrike">
+                <a:solidFill>
+                  <a:srgbClr val="000000"/>
+                </a:solidFill>
                 <a:latin typeface="Arial"/>
               </a:rPr>
               <a:t>Click to edit the outline text format</a:t>
             </a:r>
-          </a:p>
-          <a:p>
-            <a:pPr marL="864000" lvl="1" indent="-324000">
+            <a:endParaRPr b="0" lang="en-US" sz="2800" spc="-1" strike="noStrike">
+              <a:solidFill>
+                <a:srgbClr val="000000"/>
+              </a:solidFill>
+              <a:latin typeface="Arial"/>
+            </a:endParaRPr>
+          </a:p>
+          <a:p>
+            <a:pPr lvl="1" marL="864000" indent="-324000">
+              <a:lnSpc>
+                <a:spcPct val="90000"/>
+              </a:lnSpc>
               <a:spcBef>
                 <a:spcPts val="1134"/>
               </a:spcBef>
@@ -2726,14 +2880,26 @@
               <a:buChar char=""/>
             </a:pPr>
             <a:r>
-              <a:rPr lang="en-US" sz="2800" b="0" strike="noStrike" spc="-1">
+              <a:rPr b="0" lang="en-US" sz="2000" spc="-1" strike="noStrike">
+                <a:solidFill>
+                  <a:srgbClr val="000000"/>
+                </a:solidFill>
                 <a:latin typeface="Arial"/>
               </a:rPr>
               <a:t>Second Outline Level</a:t>
             </a:r>
-          </a:p>
-          <a:p>
-            <a:pPr marL="1296000" lvl="2" indent="-288000">
+            <a:endParaRPr b="0" lang="en-US" sz="2000" spc="-1" strike="noStrike">
+              <a:solidFill>
+                <a:srgbClr val="000000"/>
+              </a:solidFill>
+              <a:latin typeface="Arial"/>
+            </a:endParaRPr>
+          </a:p>
+          <a:p>
+            <a:pPr lvl="2" marL="1296000" indent="-288000">
+              <a:lnSpc>
+                <a:spcPct val="90000"/>
+              </a:lnSpc>
               <a:spcBef>
                 <a:spcPts val="850"/>
               </a:spcBef>
@@ -2745,14 +2911,26 @@
               <a:buChar char=""/>
             </a:pPr>
             <a:r>
-              <a:rPr lang="en-US" sz="2400" b="0" strike="noStrike" spc="-1">
+              <a:rPr b="0" lang="en-US" sz="1800" spc="-1" strike="noStrike">
+                <a:solidFill>
+                  <a:srgbClr val="000000"/>
+                </a:solidFill>
                 <a:latin typeface="Arial"/>
               </a:rPr>
               <a:t>Third Outline Level</a:t>
             </a:r>
-          </a:p>
-          <a:p>
-            <a:pPr marL="1728000" lvl="3" indent="-216000">
+            <a:endParaRPr b="0" lang="en-US" sz="1800" spc="-1" strike="noStrike">
+              <a:solidFill>
+                <a:srgbClr val="000000"/>
+              </a:solidFill>
+              <a:latin typeface="Arial"/>
+            </a:endParaRPr>
+          </a:p>
+          <a:p>
+            <a:pPr lvl="3" marL="1728000" indent="-216000">
+              <a:lnSpc>
+                <a:spcPct val="90000"/>
+              </a:lnSpc>
               <a:spcBef>
                 <a:spcPts val="567"/>
               </a:spcBef>
@@ -2764,14 +2942,26 @@
               <a:buChar char=""/>
             </a:pPr>
             <a:r>
-              <a:rPr lang="en-US" sz="2000" b="0" strike="noStrike" spc="-1">
+              <a:rPr b="0" lang="en-US" sz="1800" spc="-1" strike="noStrike">
+                <a:solidFill>
+                  <a:srgbClr val="000000"/>
+                </a:solidFill>
                 <a:latin typeface="Arial"/>
               </a:rPr>
               <a:t>Fourth Outline Level</a:t>
             </a:r>
-          </a:p>
-          <a:p>
-            <a:pPr marL="2160000" lvl="4" indent="-216000">
+            <a:endParaRPr b="0" lang="en-US" sz="1800" spc="-1" strike="noStrike">
+              <a:solidFill>
+                <a:srgbClr val="000000"/>
+              </a:solidFill>
+              <a:latin typeface="Arial"/>
+            </a:endParaRPr>
+          </a:p>
+          <a:p>
+            <a:pPr lvl="4" marL="2160000" indent="-216000">
+              <a:lnSpc>
+                <a:spcPct val="90000"/>
+              </a:lnSpc>
               <a:spcBef>
                 <a:spcPts val="283"/>
               </a:spcBef>
@@ -2783,14 +2973,26 @@
               <a:buChar char=""/>
             </a:pPr>
             <a:r>
-              <a:rPr lang="en-US" sz="2000" b="0" strike="noStrike" spc="-1">
+              <a:rPr b="0" lang="en-US" sz="2000" spc="-1" strike="noStrike">
+                <a:solidFill>
+                  <a:srgbClr val="000000"/>
+                </a:solidFill>
                 <a:latin typeface="Arial"/>
               </a:rPr>
               <a:t>Fifth Outline Level</a:t>
             </a:r>
-          </a:p>
-          <a:p>
-            <a:pPr marL="2592000" lvl="5" indent="-216000">
+            <a:endParaRPr b="0" lang="en-US" sz="2000" spc="-1" strike="noStrike">
+              <a:solidFill>
+                <a:srgbClr val="000000"/>
+              </a:solidFill>
+              <a:latin typeface="Arial"/>
+            </a:endParaRPr>
+          </a:p>
+          <a:p>
+            <a:pPr lvl="5" marL="2592000" indent="-216000">
+              <a:lnSpc>
+                <a:spcPct val="90000"/>
+              </a:lnSpc>
               <a:spcBef>
                 <a:spcPts val="283"/>
               </a:spcBef>
@@ -2802,14 +3004,26 @@
               <a:buChar char=""/>
             </a:pPr>
             <a:r>
-              <a:rPr lang="en-US" sz="2000" b="0" strike="noStrike" spc="-1">
+              <a:rPr b="0" lang="en-US" sz="2000" spc="-1" strike="noStrike">
+                <a:solidFill>
+                  <a:srgbClr val="000000"/>
+                </a:solidFill>
                 <a:latin typeface="Arial"/>
               </a:rPr>
               <a:t>Sixth Outline Level</a:t>
             </a:r>
-          </a:p>
-          <a:p>
-            <a:pPr marL="3024000" lvl="6" indent="-216000">
+            <a:endParaRPr b="0" lang="en-US" sz="2000" spc="-1" strike="noStrike">
+              <a:solidFill>
+                <a:srgbClr val="000000"/>
+              </a:solidFill>
+              <a:latin typeface="Arial"/>
+            </a:endParaRPr>
+          </a:p>
+          <a:p>
+            <a:pPr lvl="6" marL="3024000" indent="-216000">
+              <a:lnSpc>
+                <a:spcPct val="90000"/>
+              </a:lnSpc>
               <a:spcBef>
                 <a:spcPts val="283"/>
               </a:spcBef>
@@ -2821,316 +3035,45 @@
               <a:buChar char=""/>
             </a:pPr>
             <a:r>
-              <a:rPr lang="en-US" sz="2000" b="0" strike="noStrike" spc="-1">
+              <a:rPr b="0" lang="en-US" sz="2000" spc="-1" strike="noStrike">
+                <a:solidFill>
+                  <a:srgbClr val="000000"/>
+                </a:solidFill>
                 <a:latin typeface="Arial"/>
               </a:rPr>
               <a:t>Seventh Outline Level</a:t>
             </a:r>
+            <a:endParaRPr b="0" lang="en-US" sz="2000" spc="-1" strike="noStrike">
+              <a:solidFill>
+                <a:srgbClr val="000000"/>
+              </a:solidFill>
+              <a:latin typeface="Arial"/>
+            </a:endParaRPr>
           </a:p>
         </p:txBody>
       </p:sp>
     </p:spTree>
   </p:cSld>
-  <p:clrMap bg1="lt1" tx1="dk1" bg2="lt2" tx2="dk2" accent1="accent1" accent2="accent2" accent3="accent3" accent4="accent4" accent5="accent5" accent6="accent6" hlink="hlink" folHlink="folHlink"/>
+  <p:clrMap bg1="lt1" bg2="lt2" tx1="dk1" tx2="dk2" accent1="accent1" accent2="accent2" accent3="accent3" accent4="accent4" accent5="accent5" accent6="accent6" hlink="hlink" folHlink="folHlink"/>
   <p:sldLayoutIdLst>
-    <p:sldLayoutId id="2147483649" r:id="rId1"/>
-    <p:sldLayoutId id="2147483650" r:id="rId2"/>
-    <p:sldLayoutId id="2147483651" r:id="rId3"/>
-    <p:sldLayoutId id="2147483652" r:id="rId4"/>
-    <p:sldLayoutId id="2147483653" r:id="rId5"/>
-    <p:sldLayoutId id="2147483654" r:id="rId6"/>
-    <p:sldLayoutId id="2147483655" r:id="rId7"/>
-    <p:sldLayoutId id="2147483656" r:id="rId8"/>
-    <p:sldLayoutId id="2147483657" r:id="rId9"/>
-    <p:sldLayoutId id="2147483658" r:id="rId10"/>
-    <p:sldLayoutId id="2147483659" r:id="rId11"/>
-    <p:sldLayoutId id="2147483660" r:id="rId12"/>
+    <p:sldLayoutId id="2147483649" r:id="rId2"/>
+    <p:sldLayoutId id="2147483650" r:id="rId3"/>
+    <p:sldLayoutId id="2147483651" r:id="rId4"/>
+    <p:sldLayoutId id="2147483652" r:id="rId5"/>
+    <p:sldLayoutId id="2147483653" r:id="rId6"/>
+    <p:sldLayoutId id="2147483654" r:id="rId7"/>
+    <p:sldLayoutId id="2147483655" r:id="rId8"/>
+    <p:sldLayoutId id="2147483656" r:id="rId9"/>
+    <p:sldLayoutId id="2147483657" r:id="rId10"/>
+    <p:sldLayoutId id="2147483658" r:id="rId11"/>
+    <p:sldLayoutId id="2147483659" r:id="rId12"/>
+    <p:sldLayoutId id="2147483660" r:id="rId13"/>
   </p:sldLayoutIdLst>
-  <p:txStyles>
-    <p:titleStyle>
-      <a:lvl1pPr algn="l" defTabSz="914400" rtl="0" eaLnBrk="1" latinLnBrk="0" hangingPunct="1">
-        <a:lnSpc>
-          <a:spcPct val="90000"/>
-        </a:lnSpc>
-        <a:spcBef>
-          <a:spcPct val="0"/>
-        </a:spcBef>
-        <a:buNone/>
-        <a:defRPr sz="4400" kern="1200">
-          <a:solidFill>
-            <a:schemeClr val="tx1"/>
-          </a:solidFill>
-          <a:latin typeface="+mj-lt"/>
-          <a:ea typeface="+mj-ea"/>
-          <a:cs typeface="+mj-cs"/>
-        </a:defRPr>
-      </a:lvl1pPr>
-    </p:titleStyle>
-    <p:bodyStyle>
-      <a:lvl1pPr marL="228600" indent="-228600" algn="l" defTabSz="914400" rtl="0" eaLnBrk="1" latinLnBrk="0" hangingPunct="1">
-        <a:lnSpc>
-          <a:spcPct val="90000"/>
-        </a:lnSpc>
-        <a:spcBef>
-          <a:spcPts val="1000"/>
-        </a:spcBef>
-        <a:buFont typeface="Arial" panose="020B0604020202020204" pitchFamily="34" charset="0"/>
-        <a:buChar char="•"/>
-        <a:defRPr sz="2800" kern="1200">
-          <a:solidFill>
-            <a:schemeClr val="tx1"/>
-          </a:solidFill>
-          <a:latin typeface="+mn-lt"/>
-          <a:ea typeface="+mn-ea"/>
-          <a:cs typeface="+mn-cs"/>
-        </a:defRPr>
-      </a:lvl1pPr>
-      <a:lvl2pPr marL="685800" indent="-228600" algn="l" defTabSz="914400" rtl="0" eaLnBrk="1" latinLnBrk="0" hangingPunct="1">
-        <a:lnSpc>
-          <a:spcPct val="90000"/>
-        </a:lnSpc>
-        <a:spcBef>
-          <a:spcPts val="500"/>
-        </a:spcBef>
-        <a:buFont typeface="Arial" panose="020B0604020202020204" pitchFamily="34" charset="0"/>
-        <a:buChar char="•"/>
-        <a:defRPr sz="2400" kern="1200">
-          <a:solidFill>
-            <a:schemeClr val="tx1"/>
-          </a:solidFill>
-          <a:latin typeface="+mn-lt"/>
-          <a:ea typeface="+mn-ea"/>
-          <a:cs typeface="+mn-cs"/>
-        </a:defRPr>
-      </a:lvl2pPr>
-      <a:lvl3pPr marL="1143000" indent="-228600" algn="l" defTabSz="914400" rtl="0" eaLnBrk="1" latinLnBrk="0" hangingPunct="1">
-        <a:lnSpc>
-          <a:spcPct val="90000"/>
-        </a:lnSpc>
-        <a:spcBef>
-          <a:spcPts val="500"/>
-        </a:spcBef>
-        <a:buFont typeface="Arial" panose="020B0604020202020204" pitchFamily="34" charset="0"/>
-        <a:buChar char="•"/>
-        <a:defRPr sz="2000" kern="1200">
-          <a:solidFill>
-            <a:schemeClr val="tx1"/>
-          </a:solidFill>
-          <a:latin typeface="+mn-lt"/>
-          <a:ea typeface="+mn-ea"/>
-          <a:cs typeface="+mn-cs"/>
-        </a:defRPr>
-      </a:lvl3pPr>
-      <a:lvl4pPr marL="1600200" indent="-228600" algn="l" defTabSz="914400" rtl="0" eaLnBrk="1" latinLnBrk="0" hangingPunct="1">
-        <a:lnSpc>
-          <a:spcPct val="90000"/>
-        </a:lnSpc>
-        <a:spcBef>
-          <a:spcPts val="500"/>
-        </a:spcBef>
-        <a:buFont typeface="Arial" panose="020B0604020202020204" pitchFamily="34" charset="0"/>
-        <a:buChar char="•"/>
-        <a:defRPr sz="1800" kern="1200">
-          <a:solidFill>
-            <a:schemeClr val="tx1"/>
-          </a:solidFill>
-          <a:latin typeface="+mn-lt"/>
-          <a:ea typeface="+mn-ea"/>
-          <a:cs typeface="+mn-cs"/>
-        </a:defRPr>
-      </a:lvl4pPr>
-      <a:lvl5pPr marL="2057400" indent="-228600" algn="l" defTabSz="914400" rtl="0" eaLnBrk="1" latinLnBrk="0" hangingPunct="1">
-        <a:lnSpc>
-          <a:spcPct val="90000"/>
-        </a:lnSpc>
-        <a:spcBef>
-          <a:spcPts val="500"/>
-        </a:spcBef>
-        <a:buFont typeface="Arial" panose="020B0604020202020204" pitchFamily="34" charset="0"/>
-        <a:buChar char="•"/>
-        <a:defRPr sz="1800" kern="1200">
-          <a:solidFill>
-            <a:schemeClr val="tx1"/>
-          </a:solidFill>
-          <a:latin typeface="+mn-lt"/>
-          <a:ea typeface="+mn-ea"/>
-          <a:cs typeface="+mn-cs"/>
-        </a:defRPr>
-      </a:lvl5pPr>
-      <a:lvl6pPr marL="2514600" indent="-228600" algn="l" defTabSz="914400" rtl="0" eaLnBrk="1" latinLnBrk="0" hangingPunct="1">
-        <a:lnSpc>
-          <a:spcPct val="90000"/>
-        </a:lnSpc>
-        <a:spcBef>
-          <a:spcPts val="500"/>
-        </a:spcBef>
-        <a:buFont typeface="Arial" panose="020B0604020202020204" pitchFamily="34" charset="0"/>
-        <a:buChar char="•"/>
-        <a:defRPr sz="1800" kern="1200">
-          <a:solidFill>
-            <a:schemeClr val="tx1"/>
-          </a:solidFill>
-          <a:latin typeface="+mn-lt"/>
-          <a:ea typeface="+mn-ea"/>
-          <a:cs typeface="+mn-cs"/>
-        </a:defRPr>
-      </a:lvl6pPr>
-      <a:lvl7pPr marL="2971800" indent="-228600" algn="l" defTabSz="914400" rtl="0" eaLnBrk="1" latinLnBrk="0" hangingPunct="1">
-        <a:lnSpc>
-          <a:spcPct val="90000"/>
-        </a:lnSpc>
-        <a:spcBef>
-          <a:spcPts val="500"/>
-        </a:spcBef>
-        <a:buFont typeface="Arial" panose="020B0604020202020204" pitchFamily="34" charset="0"/>
-        <a:buChar char="•"/>
-        <a:defRPr sz="1800" kern="1200">
-          <a:solidFill>
-            <a:schemeClr val="tx1"/>
-          </a:solidFill>
-          <a:latin typeface="+mn-lt"/>
-          <a:ea typeface="+mn-ea"/>
-          <a:cs typeface="+mn-cs"/>
-        </a:defRPr>
-      </a:lvl7pPr>
-      <a:lvl8pPr marL="3429000" indent="-228600" algn="l" defTabSz="914400" rtl="0" eaLnBrk="1" latinLnBrk="0" hangingPunct="1">
-        <a:lnSpc>
-          <a:spcPct val="90000"/>
-        </a:lnSpc>
-        <a:spcBef>
-          <a:spcPts val="500"/>
-        </a:spcBef>
-        <a:buFont typeface="Arial" panose="020B0604020202020204" pitchFamily="34" charset="0"/>
-        <a:buChar char="•"/>
-        <a:defRPr sz="1800" kern="1200">
-          <a:solidFill>
-            <a:schemeClr val="tx1"/>
-          </a:solidFill>
-          <a:latin typeface="+mn-lt"/>
-          <a:ea typeface="+mn-ea"/>
-          <a:cs typeface="+mn-cs"/>
-        </a:defRPr>
-      </a:lvl8pPr>
-      <a:lvl9pPr marL="3886200" indent="-228600" algn="l" defTabSz="914400" rtl="0" eaLnBrk="1" latinLnBrk="0" hangingPunct="1">
-        <a:lnSpc>
-          <a:spcPct val="90000"/>
-        </a:lnSpc>
-        <a:spcBef>
-          <a:spcPts val="500"/>
-        </a:spcBef>
-        <a:buFont typeface="Arial" panose="020B0604020202020204" pitchFamily="34" charset="0"/>
-        <a:buChar char="•"/>
-        <a:defRPr sz="1800" kern="1200">
-          <a:solidFill>
-            <a:schemeClr val="tx1"/>
-          </a:solidFill>
-          <a:latin typeface="+mn-lt"/>
-          <a:ea typeface="+mn-ea"/>
-          <a:cs typeface="+mn-cs"/>
-        </a:defRPr>
-      </a:lvl9pPr>
-    </p:bodyStyle>
-    <p:otherStyle>
-      <a:defPPr>
-        <a:defRPr lang="en-US"/>
-      </a:defPPr>
-      <a:lvl1pPr marL="0" algn="l" defTabSz="914400" rtl="0" eaLnBrk="1" latinLnBrk="0" hangingPunct="1">
-        <a:defRPr sz="1800" kern="1200">
-          <a:solidFill>
-            <a:schemeClr val="tx1"/>
-          </a:solidFill>
-          <a:latin typeface="+mn-lt"/>
-          <a:ea typeface="+mn-ea"/>
-          <a:cs typeface="+mn-cs"/>
-        </a:defRPr>
-      </a:lvl1pPr>
-      <a:lvl2pPr marL="457200" algn="l" defTabSz="914400" rtl="0" eaLnBrk="1" latinLnBrk="0" hangingPunct="1">
-        <a:defRPr sz="1800" kern="1200">
-          <a:solidFill>
-            <a:schemeClr val="tx1"/>
-          </a:solidFill>
-          <a:latin typeface="+mn-lt"/>
-          <a:ea typeface="+mn-ea"/>
-          <a:cs typeface="+mn-cs"/>
-        </a:defRPr>
-      </a:lvl2pPr>
-      <a:lvl3pPr marL="914400" algn="l" defTabSz="914400" rtl="0" eaLnBrk="1" latinLnBrk="0" hangingPunct="1">
-        <a:defRPr sz="1800" kern="1200">
-          <a:solidFill>
-            <a:schemeClr val="tx1"/>
-          </a:solidFill>
-          <a:latin typeface="+mn-lt"/>
-          <a:ea typeface="+mn-ea"/>
-          <a:cs typeface="+mn-cs"/>
-        </a:defRPr>
-      </a:lvl3pPr>
-      <a:lvl4pPr marL="1371600" algn="l" defTabSz="914400" rtl="0" eaLnBrk="1" latinLnBrk="0" hangingPunct="1">
-        <a:defRPr sz="1800" kern="1200">
-          <a:solidFill>
-            <a:schemeClr val="tx1"/>
-          </a:solidFill>
-          <a:latin typeface="+mn-lt"/>
-          <a:ea typeface="+mn-ea"/>
-          <a:cs typeface="+mn-cs"/>
-        </a:defRPr>
-      </a:lvl4pPr>
-      <a:lvl5pPr marL="1828800" algn="l" defTabSz="914400" rtl="0" eaLnBrk="1" latinLnBrk="0" hangingPunct="1">
-        <a:defRPr sz="1800" kern="1200">
-          <a:solidFill>
-            <a:schemeClr val="tx1"/>
-          </a:solidFill>
-          <a:latin typeface="+mn-lt"/>
-          <a:ea typeface="+mn-ea"/>
-          <a:cs typeface="+mn-cs"/>
-        </a:defRPr>
-      </a:lvl5pPr>
-      <a:lvl6pPr marL="2286000" algn="l" defTabSz="914400" rtl="0" eaLnBrk="1" latinLnBrk="0" hangingPunct="1">
-        <a:defRPr sz="1800" kern="1200">
-          <a:solidFill>
-            <a:schemeClr val="tx1"/>
-          </a:solidFill>
-          <a:latin typeface="+mn-lt"/>
-          <a:ea typeface="+mn-ea"/>
-          <a:cs typeface="+mn-cs"/>
-        </a:defRPr>
-      </a:lvl6pPr>
-      <a:lvl7pPr marL="2743200" algn="l" defTabSz="914400" rtl="0" eaLnBrk="1" latinLnBrk="0" hangingPunct="1">
-        <a:defRPr sz="1800" kern="1200">
-          <a:solidFill>
-            <a:schemeClr val="tx1"/>
-          </a:solidFill>
-          <a:latin typeface="+mn-lt"/>
-          <a:ea typeface="+mn-ea"/>
-          <a:cs typeface="+mn-cs"/>
-        </a:defRPr>
-      </a:lvl7pPr>
-      <a:lvl8pPr marL="3200400" algn="l" defTabSz="914400" rtl="0" eaLnBrk="1" latinLnBrk="0" hangingPunct="1">
-        <a:defRPr sz="1800" kern="1200">
-          <a:solidFill>
-            <a:schemeClr val="tx1"/>
-          </a:solidFill>
-          <a:latin typeface="+mn-lt"/>
-          <a:ea typeface="+mn-ea"/>
-          <a:cs typeface="+mn-cs"/>
-        </a:defRPr>
-      </a:lvl8pPr>
-      <a:lvl9pPr marL="3657600" algn="l" defTabSz="914400" rtl="0" eaLnBrk="1" latinLnBrk="0" hangingPunct="1">
-        <a:defRPr sz="1800" kern="1200">
-          <a:solidFill>
-            <a:schemeClr val="tx1"/>
-          </a:solidFill>
-          <a:latin typeface="+mn-lt"/>
-          <a:ea typeface="+mn-ea"/>
-          <a:cs typeface="+mn-cs"/>
-        </a:defRPr>
-      </a:lvl9pPr>
-    </p:otherStyle>
-  </p:txStyles>
 </p:sldMaster>
 </file>
 
 <file path=ppt/slides/slide1.xml><?xml version="1.0" encoding="utf-8"?>
-<p:sld xmlns:a="http://schemas.openxmlformats.org/drawingml/2006/main" xmlns:r="http://schemas.openxmlformats.org/officeDocument/2006/relationships" xmlns:p="http://schemas.openxmlformats.org/presentationml/2006/main">
+<p:sld xmlns:a="http://schemas.openxmlformats.org/drawingml/2006/main" xmlns:p="http://schemas.openxmlformats.org/presentationml/2006/main" xmlns:r="http://schemas.openxmlformats.org/officeDocument/2006/relationships" xmlns:p14="http://schemas.microsoft.com/office/powerpoint/2010/main" xmlns:p15="http://schemas.microsoft.com/office/powerpoint/2012/main" xmlns:mc="http://schemas.openxmlformats.org/markup-compatibility/2006">
   <p:cSld>
     <p:spTree>
       <p:nvGrpSpPr>
@@ -3148,133 +3091,140 @@
       </p:grpSpPr>
       <p:sp>
         <p:nvSpPr>
-          <p:cNvPr id="3" name="TextBox 2">
-            <a:extLst>
-              <a:ext uri="{FF2B5EF4-FFF2-40B4-BE49-F238E27FC236}">
-                <a16:creationId xmlns:a16="http://schemas.microsoft.com/office/drawing/2014/main" id="{3051C3B5-C666-7C48-A3BE-51A095F133D5}"/>
-              </a:ext>
-            </a:extLst>
-          </p:cNvPr>
-          <p:cNvSpPr txBox="1"/>
+          <p:cNvPr id="41" name="TextBox 2"/>
+          <p:cNvSpPr/>
           <p:nvPr/>
         </p:nvSpPr>
         <p:spPr>
           <a:xfrm>
-            <a:off x="450849" y="759916"/>
-            <a:ext cx="9178925" cy="2776401"/>
-          </a:xfrm>
-          <a:prstGeom prst="rect">
-            <a:avLst/>
-          </a:prstGeom>
-          <a:noFill/>
-        </p:spPr>
-        <p:txBody>
-          <a:bodyPr wrap="square">
+            <a:off x="457200" y="1143000"/>
+            <a:ext cx="9178560" cy="1187640"/>
+          </a:xfrm>
+          <a:prstGeom prst="rect">
+            <a:avLst/>
+          </a:prstGeom>
+          <a:noFill/>
+          <a:ln w="0">
+            <a:noFill/>
+          </a:ln>
+        </p:spPr>
+        <p:style>
+          <a:lnRef idx="0"/>
+          <a:fillRef idx="0"/>
+          <a:effectRef idx="0"/>
+          <a:fontRef idx="minor"/>
+        </p:style>
+        <p:txBody>
+          <a:bodyPr lIns="90000" rIns="90000" tIns="45000" bIns="45000" anchor="t">
             <a:spAutoFit/>
           </a:bodyPr>
-          <a:lstStyle/>
-          <a:p>
-            <a:pPr marL="342900" lvl="0" indent="-342900">
+          <a:p>
+            <a:pPr marL="343080" indent="-343080">
               <a:lnSpc>
                 <a:spcPct val="200000"/>
               </a:lnSpc>
-              <a:buFont typeface="+mj-lt"/>
+              <a:buClr>
+                <a:srgbClr val="000000"/>
+              </a:buClr>
+              <a:buFont typeface="Arial"/>
               <a:buAutoNum type="arabicPeriod"/>
             </a:pPr>
             <a:r>
-              <a:rPr lang="en-IN" b="1" dirty="0"/>
-              <a:t>What is ROS? Explain its purpose and major features in robotics.</a:t>
-            </a:r>
-            <a:r>
-              <a:rPr lang="en-IN" dirty="0"/>
-              <a:t> </a:t>
-            </a:r>
-          </a:p>
-          <a:p>
-            <a:pPr marL="342900" lvl="0" indent="-342900">
+              <a:rPr b="0" lang="en-IN" sz="1800" spc="-1" strike="noStrike">
+                <a:solidFill>
+                  <a:srgbClr val="000000"/>
+                </a:solidFill>
+                <a:latin typeface="Arial"/>
+                <a:ea typeface="DejaVu Sans"/>
+              </a:rPr>
+              <a:t>ROS nodes, topics and messages. </a:t>
+            </a:r>
+            <a:endParaRPr b="0" lang="en-US" sz="1800" spc="-1" strike="noStrike">
+              <a:latin typeface="Arial"/>
+            </a:endParaRPr>
+          </a:p>
+          <a:p>
+            <a:pPr marL="343080" indent="-343080">
               <a:lnSpc>
                 <a:spcPct val="200000"/>
               </a:lnSpc>
-              <a:buFont typeface="+mj-lt"/>
+              <a:buClr>
+                <a:srgbClr val="000000"/>
+              </a:buClr>
+              <a:buFont typeface="Arial"/>
               <a:buAutoNum type="arabicPeriod"/>
             </a:pPr>
             <a:r>
-              <a:rPr lang="en-IN" b="1" dirty="0"/>
-              <a:t>Explain the basic architecture of ROS 2 with a neat diagram.</a:t>
-            </a:r>
-            <a:r>
-              <a:rPr lang="en-IN" dirty="0"/>
-              <a:t> </a:t>
-            </a:r>
-          </a:p>
-          <a:p>
-            <a:pPr marL="342900" lvl="0" indent="-342900">
-              <a:lnSpc>
-                <a:spcPct val="200000"/>
-              </a:lnSpc>
-              <a:buFont typeface="+mj-lt"/>
-              <a:buAutoNum type="arabicPeriod"/>
-            </a:pPr>
-            <a:r>
-              <a:rPr lang="en-IN" b="1" dirty="0"/>
-              <a:t>What is a ROS 2 node? Explain its role with a suitable example.</a:t>
-            </a:r>
-            <a:r>
-              <a:rPr lang="en-IN" dirty="0"/>
-              <a:t> </a:t>
-            </a:r>
-          </a:p>
-          <a:p>
-            <a:pPr marL="342900" lvl="0" indent="-342900">
-              <a:lnSpc>
-                <a:spcPct val="200000"/>
-              </a:lnSpc>
-              <a:buFont typeface="+mj-lt"/>
-              <a:buAutoNum type="arabicPeriod"/>
-            </a:pPr>
-            <a:r>
-              <a:rPr lang="en-IN" b="1" dirty="0"/>
-              <a:t>Differentiate between a ROS 2 node, topic, publisher, and subscriber.</a:t>
-            </a:r>
-            <a:r>
-              <a:rPr lang="en-IN" dirty="0"/>
-              <a:t> </a:t>
-            </a:r>
-          </a:p>
-          <a:p>
-            <a:pPr marL="342900" lvl="0" indent="-342900">
-              <a:lnSpc>
-                <a:spcPct val="200000"/>
-              </a:lnSpc>
-              <a:buFont typeface="+mj-lt"/>
-              <a:buAutoNum type="arabicPeriod"/>
-            </a:pPr>
-            <a:r>
-              <a:rPr lang="en-IN" b="1" dirty="0"/>
-              <a:t>Explain the Publisher-Subscriber communication mechanism in ROS 2.</a:t>
-            </a:r>
-            <a:r>
-              <a:rPr lang="en-IN" dirty="0"/>
-              <a:t> </a:t>
-            </a:r>
+              <a:rPr b="0" lang="en-IN" sz="1800" spc="-1" strike="noStrike">
+                <a:solidFill>
+                  <a:srgbClr val="000000"/>
+                </a:solidFill>
+                <a:latin typeface="Arial"/>
+                <a:ea typeface="DejaVu Sans"/>
+              </a:rPr>
+              <a:t>ROS services and actions. </a:t>
+            </a:r>
+            <a:endParaRPr b="0" lang="en-US" sz="1800" spc="-1" strike="noStrike">
+              <a:latin typeface="Arial"/>
+            </a:endParaRPr>
+          </a:p>
+        </p:txBody>
+      </p:sp>
+      <p:sp>
+        <p:nvSpPr>
+          <p:cNvPr id="42" name=""/>
+          <p:cNvSpPr txBox="1"/>
+          <p:nvPr/>
+        </p:nvSpPr>
+        <p:spPr>
+          <a:xfrm>
+            <a:off x="3908160" y="339120"/>
+            <a:ext cx="1806840" cy="346680"/>
+          </a:xfrm>
+          <a:prstGeom prst="rect">
+            <a:avLst/>
+          </a:prstGeom>
+          <a:noFill/>
+          <a:ln w="0">
+            <a:noFill/>
+          </a:ln>
+        </p:spPr>
+        <p:txBody>
+          <a:bodyPr lIns="90000" rIns="90000" tIns="45000" bIns="45000" anchor="t">
+            <a:noAutofit/>
+          </a:bodyPr>
+          <a:p>
+            <a:r>
+              <a:rPr b="1" lang="en-IN" sz="1800" spc="-1" strike="noStrike">
+                <a:solidFill>
+                  <a:srgbClr val="000000"/>
+                </a:solidFill>
+                <a:latin typeface="Arial"/>
+                <a:ea typeface="DejaVu Sans"/>
+              </a:rPr>
+              <a:t>Explain</a:t>
+            </a:r>
+            <a:endParaRPr b="1" lang="en-US" sz="1800" spc="-1" strike="noStrike">
+              <a:latin typeface="Arial"/>
+            </a:endParaRPr>
           </a:p>
         </p:txBody>
       </p:sp>
     </p:spTree>
-    <p:extLst>
-      <p:ext uri="{BB962C8B-B14F-4D97-AF65-F5344CB8AC3E}">
-        <p14:creationId xmlns:p14="http://schemas.microsoft.com/office/powerpoint/2010/main" val="159724967"/>
-      </p:ext>
-    </p:extLst>
   </p:cSld>
-  <p:clrMapOvr>
-    <a:masterClrMapping/>
-  </p:clrMapOvr>
+  <mc:AlternateContent>
+    <mc:Choice Requires="p14">
+      <p:transition spd="slow" p14:dur="2000"/>
+    </mc:Choice>
+    <mc:Fallback>
+      <p:transition spd="slow"/>
+    </mc:Fallback>
+  </mc:AlternateContent>
 </p:sld>
 </file>
 
 <file path=ppt/slides/slide2.xml><?xml version="1.0" encoding="utf-8"?>
-<p:sld xmlns:a="http://schemas.openxmlformats.org/drawingml/2006/main" xmlns:r="http://schemas.openxmlformats.org/officeDocument/2006/relationships" xmlns:p="http://schemas.openxmlformats.org/presentationml/2006/main">
+<p:sld xmlns:a="http://schemas.openxmlformats.org/drawingml/2006/main" xmlns:p="http://schemas.openxmlformats.org/presentationml/2006/main" xmlns:r="http://schemas.openxmlformats.org/officeDocument/2006/relationships" xmlns:p14="http://schemas.microsoft.com/office/powerpoint/2010/main" xmlns:p15="http://schemas.microsoft.com/office/powerpoint/2012/main" xmlns:mc="http://schemas.openxmlformats.org/markup-compatibility/2006">
   <p:cSld>
     <p:spTree>
       <p:nvGrpSpPr>
@@ -3292,141 +3242,984 @@
       </p:grpSpPr>
       <p:sp>
         <p:nvSpPr>
-          <p:cNvPr id="7" name="TextBox 6">
-            <a:extLst>
-              <a:ext uri="{FF2B5EF4-FFF2-40B4-BE49-F238E27FC236}">
-                <a16:creationId xmlns:a16="http://schemas.microsoft.com/office/drawing/2014/main" id="{F449F19A-BF75-001B-F54C-E3268F9E7D50}"/>
-              </a:ext>
-            </a:extLst>
-          </p:cNvPr>
+          <p:cNvPr id="43" name=""/>
           <p:cNvSpPr txBox="1"/>
           <p:nvPr/>
         </p:nvSpPr>
         <p:spPr>
           <a:xfrm>
-            <a:off x="434975" y="644029"/>
-            <a:ext cx="9210674" cy="3884397"/>
-          </a:xfrm>
-          <a:prstGeom prst="rect">
-            <a:avLst/>
-          </a:prstGeom>
-          <a:noFill/>
-        </p:spPr>
-        <p:txBody>
-          <a:bodyPr wrap="square">
-            <a:spAutoFit/>
-          </a:bodyPr>
-          <a:lstStyle/>
-          <a:p>
-            <a:pPr marL="342900" lvl="0" indent="-342900">
+            <a:off x="4572000" y="83520"/>
+            <a:ext cx="5029200" cy="657000"/>
+          </a:xfrm>
+          <a:prstGeom prst="rect">
+            <a:avLst/>
+          </a:prstGeom>
+          <a:noFill/>
+          <a:ln w="0">
+            <a:noFill/>
+          </a:ln>
+        </p:spPr>
+        <p:txBody>
+          <a:bodyPr lIns="90000" rIns="90000" tIns="45000" bIns="45000" anchor="t">
+            <a:noAutofit/>
+          </a:bodyPr>
+          <a:p>
+            <a:pPr marL="343080" indent="-343080">
               <a:lnSpc>
                 <a:spcPct val="200000"/>
               </a:lnSpc>
-              <a:buFont typeface="+mj-lt"/>
-              <a:buAutoNum type="arabicPeriod" startAt="6"/>
+              <a:buClr>
+                <a:srgbClr val="000000"/>
+              </a:buClr>
+              <a:buAutoNum type="arabicPeriod"/>
             </a:pPr>
             <a:r>
-              <a:rPr lang="en-IN" sz="1800" b="1" dirty="0"/>
-              <a:t>What is a ROS 2 topic? Explain how data is transmitted through a topic.</a:t>
-            </a:r>
-            <a:r>
-              <a:rPr lang="en-IN" sz="1800" dirty="0"/>
-              <a:t> </a:t>
-            </a:r>
-          </a:p>
-          <a:p>
-            <a:pPr marL="342900" lvl="0" indent="-342900">
+              <a:rPr b="1" lang="en-IN" sz="2000" spc="-1" strike="noStrike">
+                <a:solidFill>
+                  <a:srgbClr val="000000"/>
+                </a:solidFill>
+                <a:latin typeface="Arial"/>
+                <a:ea typeface="DejaVu Sans"/>
+              </a:rPr>
+              <a:t>ROS nodes, topics and </a:t>
+            </a:r>
+            <a:r>
+              <a:rPr b="1" lang="en-IN" sz="2000" spc="-1" strike="noStrike">
+                <a:solidFill>
+                  <a:srgbClr val="000000"/>
+                </a:solidFill>
+                <a:latin typeface="Arial"/>
+                <a:ea typeface="DejaVu Sans"/>
+              </a:rPr>
+              <a:t>message </a:t>
+            </a:r>
+            <a:endParaRPr b="1" lang="en-US" sz="2000" spc="-1" strike="noStrike">
+              <a:latin typeface="Arial"/>
+            </a:endParaRPr>
+          </a:p>
+        </p:txBody>
+      </p:sp>
+      <p:pic>
+        <p:nvPicPr>
+          <p:cNvPr id="44" name="" descr=""/>
+          <p:cNvPicPr/>
+          <p:nvPr/>
+        </p:nvPicPr>
+        <p:blipFill>
+          <a:blip r:embed="rId1"/>
+          <a:srcRect l="31015" t="0" r="31480" b="0"/>
+          <a:stretch/>
+        </p:blipFill>
+        <p:spPr>
+          <a:xfrm>
+            <a:off x="228960" y="162360"/>
+            <a:ext cx="3657240" cy="5324040"/>
+          </a:xfrm>
+          <a:prstGeom prst="rect">
+            <a:avLst/>
+          </a:prstGeom>
+          <a:ln w="0">
+            <a:noFill/>
+          </a:ln>
+        </p:spPr>
+      </p:pic>
+    </p:spTree>
+  </p:cSld>
+  <mc:AlternateContent>
+    <mc:Choice Requires="p14">
+      <p:transition spd="slow" p14:dur="2000"/>
+    </mc:Choice>
+    <mc:Fallback>
+      <p:transition spd="slow"/>
+    </mc:Fallback>
+  </mc:AlternateContent>
+</p:sld>
+</file>
+
+<file path=ppt/slides/slide3.xml><?xml version="1.0" encoding="utf-8"?>
+<p:sld xmlns:a="http://schemas.openxmlformats.org/drawingml/2006/main" xmlns:p="http://schemas.openxmlformats.org/presentationml/2006/main" xmlns:r="http://schemas.openxmlformats.org/officeDocument/2006/relationships" xmlns:p14="http://schemas.microsoft.com/office/powerpoint/2010/main" xmlns:p15="http://schemas.microsoft.com/office/powerpoint/2012/main" xmlns:mc="http://schemas.openxmlformats.org/markup-compatibility/2006">
+  <p:cSld>
+    <p:spTree>
+      <p:nvGrpSpPr>
+        <p:cNvPr id="1" name=""/>
+        <p:cNvGrpSpPr/>
+        <p:nvPr/>
+      </p:nvGrpSpPr>
+      <p:grpSpPr>
+        <a:xfrm>
+          <a:off x="0" y="0"/>
+          <a:ext cx="0" cy="0"/>
+          <a:chOff x="0" y="0"/>
+          <a:chExt cx="0" cy="0"/>
+        </a:xfrm>
+      </p:grpSpPr>
+      <p:sp>
+        <p:nvSpPr>
+          <p:cNvPr id="45" name=""/>
+          <p:cNvSpPr txBox="1"/>
+          <p:nvPr/>
+        </p:nvSpPr>
+        <p:spPr>
+          <a:xfrm>
+            <a:off x="914400" y="228600"/>
+            <a:ext cx="4114800" cy="602280"/>
+          </a:xfrm>
+          <a:prstGeom prst="rect">
+            <a:avLst/>
+          </a:prstGeom>
+          <a:noFill/>
+          <a:ln w="0">
+            <a:noFill/>
+          </a:ln>
+        </p:spPr>
+        <p:txBody>
+          <a:bodyPr lIns="90000" rIns="90000" tIns="45000" bIns="45000" anchor="t">
+            <a:noAutofit/>
+          </a:bodyPr>
+          <a:p>
+            <a:pPr marL="343080" indent="-343080">
               <a:lnSpc>
                 <a:spcPct val="200000"/>
               </a:lnSpc>
-              <a:buFont typeface="+mj-lt"/>
-              <a:buAutoNum type="arabicPeriod" startAt="6"/>
+              <a:buClr>
+                <a:srgbClr val="000000"/>
+              </a:buClr>
+              <a:buAutoNum type="arabicPeriod"/>
             </a:pPr>
             <a:r>
-              <a:rPr lang="en-IN" sz="1800" b="1" dirty="0"/>
-              <a:t>What are ROS 2 messages? Explain the purpose of standard message types such as </a:t>
-            </a:r>
-            <a:r>
-              <a:rPr lang="en-IN" sz="1800" b="1" dirty="0">
-                <a:latin typeface="+mn-lt"/>
+              <a:rPr b="1" lang="en-IN" sz="1800" spc="-1" strike="noStrike">
+                <a:solidFill>
+                  <a:srgbClr val="000000"/>
+                </a:solidFill>
+                <a:latin typeface="Arial"/>
+                <a:ea typeface="DejaVu Sans"/>
               </a:rPr>
-              <a:t>Float32</a:t>
-            </a:r>
-            <a:r>
-              <a:rPr lang="en-IN" sz="1800" b="1" dirty="0"/>
-              <a:t>, </a:t>
-            </a:r>
-            <a:r>
-              <a:rPr lang="en-IN" sz="1800" b="1" dirty="0">
-                <a:latin typeface="+mn-lt"/>
+              <a:t>ROS services. </a:t>
+            </a:r>
+            <a:endParaRPr b="1" lang="en-US" sz="1800" spc="-1" strike="noStrike">
+              <a:latin typeface="Arial"/>
+            </a:endParaRPr>
+          </a:p>
+        </p:txBody>
+      </p:sp>
+      <p:sp>
+        <p:nvSpPr>
+          <p:cNvPr id="46" name=""/>
+          <p:cNvSpPr txBox="1"/>
+          <p:nvPr/>
+        </p:nvSpPr>
+        <p:spPr>
+          <a:xfrm>
+            <a:off x="1371600" y="1143000"/>
+            <a:ext cx="4114800" cy="489960"/>
+          </a:xfrm>
+          <a:prstGeom prst="rect">
+            <a:avLst/>
+          </a:prstGeom>
+          <a:noFill/>
+          <a:ln w="0">
+            <a:noFill/>
+          </a:ln>
+        </p:spPr>
+        <p:txBody>
+          <a:bodyPr lIns="90000" rIns="90000" tIns="45000" bIns="45000" anchor="t">
+            <a:noAutofit/>
+          </a:bodyPr>
+          <a:p>
+            <a:r>
+              <a:rPr b="0" lang="en-US" sz="1400" spc="-1" strike="noStrike">
+                <a:latin typeface="Arial"/>
               </a:rPr>
-              <a:t>Float32MultiArray</a:t>
-            </a:r>
-            <a:r>
-              <a:rPr lang="en-IN" sz="1800" b="1" dirty="0"/>
-              <a:t>.</a:t>
-            </a:r>
-            <a:r>
-              <a:rPr lang="en-IN" sz="1800" dirty="0"/>
-              <a:t>  </a:t>
-            </a:r>
-          </a:p>
-          <a:p>
-            <a:pPr marL="342900" lvl="0" indent="-342900">
+              <a:t>Service = Request + Response</a:t>
+            </a:r>
+            <a:endParaRPr b="0" lang="en-US" sz="1400" spc="-1" strike="noStrike">
+              <a:latin typeface="Arial"/>
+            </a:endParaRPr>
+          </a:p>
+        </p:txBody>
+      </p:sp>
+      <p:sp>
+        <p:nvSpPr>
+          <p:cNvPr id="47" name=""/>
+          <p:cNvSpPr txBox="1"/>
+          <p:nvPr/>
+        </p:nvSpPr>
+        <p:spPr>
+          <a:xfrm>
+            <a:off x="457200" y="1828800"/>
+            <a:ext cx="3657600" cy="2223000"/>
+          </a:xfrm>
+          <a:prstGeom prst="rect">
+            <a:avLst/>
+          </a:prstGeom>
+          <a:noFill/>
+          <a:ln w="0">
+            <a:noFill/>
+          </a:ln>
+        </p:spPr>
+        <p:txBody>
+          <a:bodyPr lIns="90000" rIns="90000" tIns="45000" bIns="45000" anchor="t">
+            <a:noAutofit/>
+          </a:bodyPr>
+          <a:p>
+            <a:r>
+              <a:rPr b="1" lang="en-US" sz="1200" spc="-1" strike="noStrike">
+                <a:latin typeface="Arial"/>
+              </a:rPr>
+              <a:t>Easy real-life example</a:t>
+            </a:r>
+            <a:endParaRPr b="1" lang="en-US" sz="1200" spc="-1" strike="noStrike">
+              <a:latin typeface="Arial"/>
+            </a:endParaRPr>
+          </a:p>
+          <a:p>
+            <a:r>
+              <a:rPr b="0" lang="en-US" sz="1200" spc="-1" strike="noStrike">
+                <a:latin typeface="Arial"/>
+              </a:rPr>
+              <a:t>Think about a lift/elevator.</a:t>
+            </a:r>
+            <a:endParaRPr b="0" lang="en-US" sz="1200" spc="-1" strike="noStrike">
+              <a:latin typeface="Arial"/>
+            </a:endParaRPr>
+          </a:p>
+          <a:p>
+            <a:r>
+              <a:rPr b="0" lang="en-US" sz="1200" spc="-1" strike="noStrike">
+                <a:latin typeface="Arial"/>
+              </a:rPr>
+              <a:t>We press:</a:t>
+            </a:r>
+            <a:endParaRPr b="0" lang="en-US" sz="1200" spc="-1" strike="noStrike">
+              <a:latin typeface="Arial"/>
+            </a:endParaRPr>
+          </a:p>
+          <a:p>
+            <a:r>
+              <a:rPr b="0" lang="en-US" sz="1200" spc="-1" strike="noStrike">
+                <a:latin typeface="Arial"/>
+              </a:rPr>
+              <a:t>Floor 5</a:t>
+            </a:r>
+            <a:endParaRPr b="0" lang="en-US" sz="1200" spc="-1" strike="noStrike">
+              <a:latin typeface="Arial"/>
+            </a:endParaRPr>
+          </a:p>
+          <a:p>
+            <a:r>
+              <a:rPr b="0" lang="en-US" sz="1200" spc="-1" strike="noStrike">
+                <a:latin typeface="Arial"/>
+              </a:rPr>
+              <a:t>The elevator receives your request and </a:t>
+            </a:r>
+            <a:r>
+              <a:rPr b="0" lang="en-US" sz="1200" spc="-1" strike="noStrike">
+                <a:latin typeface="Arial"/>
+              </a:rPr>
+              <a:t>eventually responds by taking you there.</a:t>
+            </a:r>
+            <a:endParaRPr b="0" lang="en-US" sz="1200" spc="-1" strike="noStrike">
+              <a:latin typeface="Arial"/>
+            </a:endParaRPr>
+          </a:p>
+        </p:txBody>
+      </p:sp>
+      <p:sp>
+        <p:nvSpPr>
+          <p:cNvPr id="48" name=""/>
+          <p:cNvSpPr txBox="1"/>
+          <p:nvPr/>
+        </p:nvSpPr>
+        <p:spPr>
+          <a:xfrm>
+            <a:off x="4800600" y="477000"/>
+            <a:ext cx="4600440" cy="4537080"/>
+          </a:xfrm>
+          <a:prstGeom prst="rect">
+            <a:avLst/>
+          </a:prstGeom>
+          <a:noFill/>
+          <a:ln w="0">
+            <a:noFill/>
+          </a:ln>
+        </p:spPr>
+        <p:txBody>
+          <a:bodyPr lIns="90000" rIns="90000" tIns="45000" bIns="45000" anchor="t">
+            <a:noAutofit/>
+          </a:bodyPr>
+          <a:p>
+            <a:r>
+              <a:rPr b="1" lang="en-US" sz="1500" spc="-1" strike="noStrike">
+                <a:latin typeface="Times New Roman"/>
+              </a:rPr>
+              <a:t>Topic</a:t>
+            </a:r>
+            <a:endParaRPr b="1" lang="en-US" sz="1500" spc="-1" strike="noStrike">
+              <a:latin typeface="Times New Roman"/>
+            </a:endParaRPr>
+          </a:p>
+          <a:p>
+            <a:r>
+              <a:rPr b="0" lang="en-US" sz="1300" spc="-1" strike="noStrike">
+                <a:latin typeface="Times New Roman"/>
+              </a:rPr>
+              <a:t>Think of a lift continuously sending its current floor information:</a:t>
+            </a:r>
+            <a:endParaRPr b="0" lang="en-US" sz="1300" spc="-1" strike="noStrike">
+              <a:latin typeface="Times New Roman"/>
+            </a:endParaRPr>
+          </a:p>
+          <a:p>
+            <a:r>
+              <a:rPr b="0" lang="en-US" sz="1300" spc="-1" strike="noStrike">
+                <a:latin typeface="Times New Roman"/>
+              </a:rPr>
+              <a:t>Lift ─────► "Floor 1" ─────► Display</a:t>
+            </a:r>
+            <a:endParaRPr b="0" lang="en-US" sz="1300" spc="-1" strike="noStrike">
+              <a:latin typeface="Times New Roman"/>
+              <a:ea typeface="Courier New"/>
+            </a:endParaRPr>
+          </a:p>
+          <a:p>
+            <a:r>
+              <a:rPr b="0" lang="en-US" sz="1300" spc="-1" strike="noStrike">
+                <a:latin typeface="Times New Roman"/>
+              </a:rPr>
+              <a:t>Lift ─────► "Floor 2" ─────► Display</a:t>
+            </a:r>
+            <a:endParaRPr b="0" lang="en-US" sz="1300" spc="-1" strike="noStrike">
+              <a:latin typeface="Times New Roman"/>
+              <a:ea typeface="Courier New"/>
+            </a:endParaRPr>
+          </a:p>
+          <a:p>
+            <a:r>
+              <a:rPr b="0" lang="en-US" sz="1300" spc="-1" strike="noStrike">
+                <a:latin typeface="Times New Roman"/>
+              </a:rPr>
+              <a:t>Lift ─────► "Floor 3" ─────► Display</a:t>
+            </a:r>
+            <a:endParaRPr b="0" lang="en-US" sz="1300" spc="-1" strike="noStrike">
+              <a:latin typeface="Times New Roman"/>
+              <a:ea typeface="Courier New"/>
+            </a:endParaRPr>
+          </a:p>
+          <a:p>
+            <a:r>
+              <a:rPr b="0" lang="en-US" sz="1300" spc="-1" strike="noStrike">
+                <a:latin typeface="Times New Roman"/>
+              </a:rPr>
+              <a:t>Lift ─────► "Floor 4" ─────► Display </a:t>
+            </a:r>
+            <a:endParaRPr b="0" lang="en-US" sz="1300" spc="-1" strike="noStrike">
+              <a:latin typeface="Times New Roman"/>
+              <a:ea typeface="Courier New"/>
+            </a:endParaRPr>
+          </a:p>
+          <a:p>
+            <a:endParaRPr b="0" lang="en-US" sz="1300" spc="-1" strike="noStrike">
+              <a:latin typeface="Times New Roman"/>
+              <a:ea typeface="Courier New"/>
+            </a:endParaRPr>
+          </a:p>
+          <a:p>
+            <a:r>
+              <a:rPr b="0" lang="en-US" sz="1300" spc="-1" strike="noStrike">
+                <a:latin typeface="Times New Roman"/>
+              </a:rPr>
+              <a:t>Data keeps coming continuously.</a:t>
+            </a:r>
+            <a:endParaRPr b="0" lang="en-US" sz="1300" spc="-1" strike="noStrike">
+              <a:latin typeface="Times New Roman"/>
+              <a:ea typeface="Courier New"/>
+            </a:endParaRPr>
+          </a:p>
+          <a:p>
+            <a:r>
+              <a:rPr b="0" lang="en-US" sz="1300" spc="-1" strike="noStrike">
+                <a:latin typeface="Times New Roman"/>
+              </a:rPr>
+              <a:t>Topic = continuous communication</a:t>
+            </a:r>
+            <a:endParaRPr b="0" lang="en-US" sz="1300" spc="-1" strike="noStrike">
+              <a:latin typeface="Times New Roman"/>
+              <a:ea typeface="Courier New"/>
+            </a:endParaRPr>
+          </a:p>
+          <a:p>
+            <a:r>
+              <a:rPr b="1" lang="en-US" sz="1500" spc="-1" strike="noStrike">
+                <a:latin typeface="Times New Roman"/>
+              </a:rPr>
+              <a:t>Service</a:t>
+            </a:r>
+            <a:endParaRPr b="1" lang="en-US" sz="1500" spc="-1" strike="noStrike">
+              <a:latin typeface="Times New Roman"/>
+            </a:endParaRPr>
+          </a:p>
+          <a:p>
+            <a:r>
+              <a:rPr b="0" lang="en-US" sz="1300" spc="-1" strike="noStrike">
+                <a:latin typeface="Times New Roman"/>
+              </a:rPr>
+              <a:t>Now think about pressing a lift button:</a:t>
+            </a:r>
+            <a:endParaRPr b="0" lang="en-US" sz="1300" spc="-1" strike="noStrike">
+              <a:latin typeface="Times New Roman"/>
+            </a:endParaRPr>
+          </a:p>
+          <a:p>
+            <a:r>
+              <a:rPr b="0" lang="en-US" sz="1300" spc="-1" strike="noStrike">
+                <a:latin typeface="Times New Roman"/>
+              </a:rPr>
+              <a:t>Person ── "Go to Floor 5" ──► Lift</a:t>
+            </a:r>
+            <a:endParaRPr b="0" lang="en-US" sz="1300" spc="-1" strike="noStrike">
+              <a:latin typeface="Times New Roman"/>
+              <a:ea typeface="Courier New"/>
+            </a:endParaRPr>
+          </a:p>
+          <a:p>
+            <a:r>
+              <a:rPr b="0" lang="en-US" sz="1300" spc="-1" strike="noStrike">
+                <a:latin typeface="Times New Roman"/>
+              </a:rPr>
+              <a:t>Person ◄──── "Accepted" ───── Lift </a:t>
+            </a:r>
+            <a:endParaRPr b="0" lang="en-US" sz="1300" spc="-1" strike="noStrike">
+              <a:latin typeface="Times New Roman"/>
+              <a:ea typeface="Courier New"/>
+            </a:endParaRPr>
+          </a:p>
+          <a:p>
+            <a:endParaRPr b="0" lang="en-US" sz="1300" spc="-1" strike="noStrike">
+              <a:latin typeface="Times New Roman"/>
+              <a:ea typeface="Courier New"/>
+            </a:endParaRPr>
+          </a:p>
+          <a:p>
+            <a:r>
+              <a:rPr b="0" lang="en-US" sz="1300" spc="-1" strike="noStrike">
+                <a:latin typeface="Times New Roman"/>
+              </a:rPr>
+              <a:t>The person makes a request, and the lift gives a response.</a:t>
+            </a:r>
+            <a:endParaRPr b="0" lang="en-US" sz="1300" spc="-1" strike="noStrike">
+              <a:latin typeface="Times New Roman"/>
+              <a:ea typeface="Courier New"/>
+            </a:endParaRPr>
+          </a:p>
+          <a:p>
+            <a:endParaRPr b="0" lang="en-US" sz="1300" spc="-1" strike="noStrike">
+              <a:latin typeface="Times New Roman"/>
+              <a:ea typeface="Courier New"/>
+            </a:endParaRPr>
+          </a:p>
+        </p:txBody>
+      </p:sp>
+    </p:spTree>
+  </p:cSld>
+  <mc:AlternateContent>
+    <mc:Choice Requires="p14">
+      <p:transition spd="slow" p14:dur="2000"/>
+    </mc:Choice>
+    <mc:Fallback>
+      <p:transition spd="slow"/>
+    </mc:Fallback>
+  </mc:AlternateContent>
+  <p:timing>
+    <p:tnLst>
+      <p:par>
+        <p:cTn id="1" dur="indefinite" restart="never" nodeType="tmRoot">
+          <p:childTnLst>
+            <p:seq>
+              <p:cTn id="2" dur="indefinite" nodeType="mainSeq">
+                <p:childTnLst>
+                  <p:par>
+                    <p:cTn id="3" fill="hold">
+                      <p:stCondLst>
+                        <p:cond delay="indefinite"/>
+                      </p:stCondLst>
+                      <p:childTnLst>
+                        <p:par>
+                          <p:cTn id="4" fill="hold">
+                            <p:stCondLst>
+                              <p:cond delay="0"/>
+                            </p:stCondLst>
+                            <p:childTnLst>
+                              <p:par>
+                                <p:cTn id="5" nodeType="clickEffect" fill="hold" presetClass="entr" presetID="1">
+                                  <p:stCondLst>
+                                    <p:cond delay="0"/>
+                                  </p:stCondLst>
+                                  <p:childTnLst>
+                                    <p:set>
+                                      <p:cBhvr>
+                                        <p:cTn id="6" dur="1" fill="hold">
+                                          <p:stCondLst>
+                                            <p:cond delay="0"/>
+                                          </p:stCondLst>
+                                        </p:cTn>
+                                        <p:tgtEl>
+                                          <p:spTgt spid="47">
+                                            <p:txEl>
+                                              <p:pRg st="0" end="0"/>
+                                            </p:txEl>
+                                          </p:spTgt>
+                                        </p:tgtEl>
+                                        <p:attrNameLst>
+                                          <p:attrName>style.visibility</p:attrName>
+                                        </p:attrNameLst>
+                                      </p:cBhvr>
+                                      <p:to>
+                                        <p:strVal val="visible"/>
+                                      </p:to>
+                                    </p:set>
+                                  </p:childTnLst>
+                                </p:cTn>
+                              </p:par>
+                            </p:childTnLst>
+                          </p:cTn>
+                        </p:par>
+                      </p:childTnLst>
+                    </p:cTn>
+                  </p:par>
+                  <p:par>
+                    <p:cTn id="7" fill="hold">
+                      <p:stCondLst>
+                        <p:cond delay="indefinite"/>
+                      </p:stCondLst>
+                      <p:childTnLst>
+                        <p:par>
+                          <p:cTn id="8" fill="hold">
+                            <p:stCondLst>
+                              <p:cond delay="0"/>
+                            </p:stCondLst>
+                            <p:childTnLst>
+                              <p:par>
+                                <p:cTn id="9" nodeType="clickEffect" fill="hold" presetClass="entr" presetID="1">
+                                  <p:stCondLst>
+                                    <p:cond delay="0"/>
+                                  </p:stCondLst>
+                                  <p:childTnLst>
+                                    <p:set>
+                                      <p:cBhvr>
+                                        <p:cTn id="10" dur="1" fill="hold">
+                                          <p:stCondLst>
+                                            <p:cond delay="0"/>
+                                          </p:stCondLst>
+                                        </p:cTn>
+                                        <p:tgtEl>
+                                          <p:spTgt spid="47">
+                                            <p:txEl>
+                                              <p:pRg st="1" end="1"/>
+                                            </p:txEl>
+                                          </p:spTgt>
+                                        </p:tgtEl>
+                                        <p:attrNameLst>
+                                          <p:attrName>style.visibility</p:attrName>
+                                        </p:attrNameLst>
+                                      </p:cBhvr>
+                                      <p:to>
+                                        <p:strVal val="visible"/>
+                                      </p:to>
+                                    </p:set>
+                                  </p:childTnLst>
+                                </p:cTn>
+                              </p:par>
+                            </p:childTnLst>
+                          </p:cTn>
+                        </p:par>
+                      </p:childTnLst>
+                    </p:cTn>
+                  </p:par>
+                  <p:par>
+                    <p:cTn id="11" fill="hold">
+                      <p:stCondLst>
+                        <p:cond delay="indefinite"/>
+                      </p:stCondLst>
+                      <p:childTnLst>
+                        <p:par>
+                          <p:cTn id="12" fill="hold">
+                            <p:stCondLst>
+                              <p:cond delay="0"/>
+                            </p:stCondLst>
+                            <p:childTnLst>
+                              <p:par>
+                                <p:cTn id="13" nodeType="clickEffect" fill="hold" presetClass="entr" presetID="1">
+                                  <p:stCondLst>
+                                    <p:cond delay="0"/>
+                                  </p:stCondLst>
+                                  <p:childTnLst>
+                                    <p:set>
+                                      <p:cBhvr>
+                                        <p:cTn id="14" dur="1" fill="hold">
+                                          <p:stCondLst>
+                                            <p:cond delay="0"/>
+                                          </p:stCondLst>
+                                        </p:cTn>
+                                        <p:tgtEl>
+                                          <p:spTgt spid="47">
+                                            <p:txEl>
+                                              <p:pRg st="2" end="2"/>
+                                            </p:txEl>
+                                          </p:spTgt>
+                                        </p:tgtEl>
+                                        <p:attrNameLst>
+                                          <p:attrName>style.visibility</p:attrName>
+                                        </p:attrNameLst>
+                                      </p:cBhvr>
+                                      <p:to>
+                                        <p:strVal val="visible"/>
+                                      </p:to>
+                                    </p:set>
+                                  </p:childTnLst>
+                                </p:cTn>
+                              </p:par>
+                            </p:childTnLst>
+                          </p:cTn>
+                        </p:par>
+                      </p:childTnLst>
+                    </p:cTn>
+                  </p:par>
+                  <p:par>
+                    <p:cTn id="15" fill="hold">
+                      <p:stCondLst>
+                        <p:cond delay="indefinite"/>
+                      </p:stCondLst>
+                      <p:childTnLst>
+                        <p:par>
+                          <p:cTn id="16" fill="hold">
+                            <p:stCondLst>
+                              <p:cond delay="0"/>
+                            </p:stCondLst>
+                            <p:childTnLst>
+                              <p:par>
+                                <p:cTn id="17" nodeType="clickEffect" fill="hold" presetClass="entr" presetID="1">
+                                  <p:stCondLst>
+                                    <p:cond delay="0"/>
+                                  </p:stCondLst>
+                                  <p:childTnLst>
+                                    <p:set>
+                                      <p:cBhvr>
+                                        <p:cTn id="18" dur="1" fill="hold">
+                                          <p:stCondLst>
+                                            <p:cond delay="0"/>
+                                          </p:stCondLst>
+                                        </p:cTn>
+                                        <p:tgtEl>
+                                          <p:spTgt spid="47">
+                                            <p:txEl>
+                                              <p:pRg st="3" end="3"/>
+                                            </p:txEl>
+                                          </p:spTgt>
+                                        </p:tgtEl>
+                                        <p:attrNameLst>
+                                          <p:attrName>style.visibility</p:attrName>
+                                        </p:attrNameLst>
+                                      </p:cBhvr>
+                                      <p:to>
+                                        <p:strVal val="visible"/>
+                                      </p:to>
+                                    </p:set>
+                                  </p:childTnLst>
+                                </p:cTn>
+                              </p:par>
+                            </p:childTnLst>
+                          </p:cTn>
+                        </p:par>
+                      </p:childTnLst>
+                    </p:cTn>
+                  </p:par>
+                  <p:par>
+                    <p:cTn id="19" fill="hold">
+                      <p:stCondLst>
+                        <p:cond delay="indefinite"/>
+                      </p:stCondLst>
+                      <p:childTnLst>
+                        <p:par>
+                          <p:cTn id="20" fill="hold">
+                            <p:stCondLst>
+                              <p:cond delay="0"/>
+                            </p:stCondLst>
+                            <p:childTnLst>
+                              <p:par>
+                                <p:cTn id="21" nodeType="clickEffect" fill="hold" presetClass="entr" presetID="1">
+                                  <p:stCondLst>
+                                    <p:cond delay="0"/>
+                                  </p:stCondLst>
+                                  <p:childTnLst>
+                                    <p:set>
+                                      <p:cBhvr>
+                                        <p:cTn id="22" dur="1" fill="hold">
+                                          <p:stCondLst>
+                                            <p:cond delay="0"/>
+                                          </p:stCondLst>
+                                        </p:cTn>
+                                        <p:tgtEl>
+                                          <p:spTgt spid="47">
+                                            <p:txEl>
+                                              <p:pRg st="4" end="4"/>
+                                            </p:txEl>
+                                          </p:spTgt>
+                                        </p:tgtEl>
+                                        <p:attrNameLst>
+                                          <p:attrName>style.visibility</p:attrName>
+                                        </p:attrNameLst>
+                                      </p:cBhvr>
+                                      <p:to>
+                                        <p:strVal val="visible"/>
+                                      </p:to>
+                                    </p:set>
+                                  </p:childTnLst>
+                                </p:cTn>
+                              </p:par>
+                            </p:childTnLst>
+                          </p:cTn>
+                        </p:par>
+                      </p:childTnLst>
+                    </p:cTn>
+                  </p:par>
+                </p:childTnLst>
+              </p:cTn>
+              <p:prevCondLst>
+                <p:cond evt="onPrev">
+                  <p:tgtEl>
+                    <p:sldTgt/>
+                  </p:tgtEl>
+                </p:cond>
+              </p:prevCondLst>
+              <p:nextCondLst>
+                <p:cond evt="onNext">
+                  <p:tgtEl>
+                    <p:sldTgt/>
+                  </p:tgtEl>
+                </p:cond>
+              </p:nextCondLst>
+            </p:seq>
+          </p:childTnLst>
+        </p:cTn>
+      </p:par>
+    </p:tnLst>
+  </p:timing>
+</p:sld>
+</file>
+
+<file path=ppt/slides/slide4.xml><?xml version="1.0" encoding="utf-8"?>
+<p:sld xmlns:a="http://schemas.openxmlformats.org/drawingml/2006/main" xmlns:p="http://schemas.openxmlformats.org/presentationml/2006/main" xmlns:r="http://schemas.openxmlformats.org/officeDocument/2006/relationships" xmlns:p14="http://schemas.microsoft.com/office/powerpoint/2010/main" xmlns:p15="http://schemas.microsoft.com/office/powerpoint/2012/main" xmlns:mc="http://schemas.openxmlformats.org/markup-compatibility/2006">
+  <p:cSld>
+    <p:spTree>
+      <p:nvGrpSpPr>
+        <p:cNvPr id="1" name=""/>
+        <p:cNvGrpSpPr/>
+        <p:nvPr/>
+      </p:nvGrpSpPr>
+      <p:grpSpPr>
+        <a:xfrm>
+          <a:off x="0" y="0"/>
+          <a:ext cx="0" cy="0"/>
+          <a:chOff x="0" y="0"/>
+          <a:chExt cx="0" cy="0"/>
+        </a:xfrm>
+      </p:grpSpPr>
+      <p:sp>
+        <p:nvSpPr>
+          <p:cNvPr id="49" name="TextBox 6"/>
+          <p:cNvSpPr/>
+          <p:nvPr/>
+        </p:nvSpPr>
+        <p:spPr>
+          <a:xfrm>
+            <a:off x="434880" y="644040"/>
+            <a:ext cx="9210240" cy="3930120"/>
+          </a:xfrm>
+          <a:prstGeom prst="rect">
+            <a:avLst/>
+          </a:prstGeom>
+          <a:noFill/>
+          <a:ln w="0">
+            <a:noFill/>
+          </a:ln>
+        </p:spPr>
+        <p:style>
+          <a:lnRef idx="0"/>
+          <a:fillRef idx="0"/>
+          <a:effectRef idx="0"/>
+          <a:fontRef idx="minor"/>
+        </p:style>
+        <p:txBody>
+          <a:bodyPr lIns="90000" rIns="90000" tIns="45000" bIns="45000" anchor="t">
+            <a:spAutoFit/>
+          </a:bodyPr>
+          <a:p>
+            <a:pPr marL="343080" indent="-343080">
               <a:lnSpc>
                 <a:spcPct val="200000"/>
               </a:lnSpc>
-              <a:buFont typeface="+mj-lt"/>
-              <a:buAutoNum type="arabicPeriod" startAt="6"/>
+              <a:buClr>
+                <a:srgbClr val="000000"/>
+              </a:buClr>
+              <a:buFont typeface="Arial"/>
+              <a:buAutoNum type="arabicPeriod"/>
             </a:pPr>
             <a:r>
-              <a:rPr lang="en-IN" sz="1800" b="1" dirty="0"/>
-              <a:t>What are ROS 2 services? How are they different from topics?</a:t>
-            </a:r>
-            <a:r>
-              <a:rPr lang="en-IN" sz="1800" dirty="0"/>
+              <a:rPr b="1" lang="en-IN" sz="1800" spc="-1" strike="noStrike">
+                <a:solidFill>
+                  <a:srgbClr val="000000"/>
+                </a:solidFill>
+                <a:latin typeface="Arial"/>
+                <a:ea typeface="DejaVu Sans"/>
+              </a:rPr>
+              <a:t>What is a ROS 2 topic? Explain how data is transmitted through a topic.</a:t>
+            </a:r>
+            <a:r>
+              <a:rPr b="0" lang="en-IN" sz="1800" spc="-1" strike="noStrike">
+                <a:solidFill>
+                  <a:srgbClr val="000000"/>
+                </a:solidFill>
+                <a:latin typeface="Arial"/>
+                <a:ea typeface="DejaVu Sans"/>
+              </a:rPr>
               <a:t> </a:t>
             </a:r>
-          </a:p>
-          <a:p>
-            <a:pPr marL="342900" lvl="0" indent="-342900">
+            <a:endParaRPr b="0" lang="en-US" sz="1800" spc="-1" strike="noStrike">
+              <a:latin typeface="Arial"/>
+            </a:endParaRPr>
+          </a:p>
+          <a:p>
+            <a:pPr marL="343080" indent="-343080">
               <a:lnSpc>
                 <a:spcPct val="200000"/>
               </a:lnSpc>
-              <a:buFont typeface="+mj-lt"/>
-              <a:buAutoNum type="arabicPeriod" startAt="6"/>
+              <a:buClr>
+                <a:srgbClr val="000000"/>
+              </a:buClr>
+              <a:buFont typeface="Arial"/>
+              <a:buAutoNum type="arabicPeriod"/>
             </a:pPr>
             <a:r>
-              <a:rPr lang="en-IN" sz="1800" b="1" dirty="0"/>
-              <a:t>What are ROS 2 actions? Explain where actions are useful in robotics applications.</a:t>
-            </a:r>
-          </a:p>
-          <a:p>
-            <a:pPr marL="342900" indent="-342900">
+              <a:rPr b="1" lang="en-IN" sz="1800" spc="-1" strike="noStrike">
+                <a:solidFill>
+                  <a:srgbClr val="000000"/>
+                </a:solidFill>
+                <a:latin typeface="Arial"/>
+                <a:ea typeface="DejaVu Sans"/>
+              </a:rPr>
+              <a:t>What are ROS 2 messages? Explain the purpose of standard message types such as Float32, Float32MultiArray.</a:t>
+            </a:r>
+            <a:r>
+              <a:rPr b="0" lang="en-IN" sz="1800" spc="-1" strike="noStrike">
+                <a:solidFill>
+                  <a:srgbClr val="000000"/>
+                </a:solidFill>
+                <a:latin typeface="Arial"/>
+                <a:ea typeface="DejaVu Sans"/>
+              </a:rPr>
+              <a:t>  </a:t>
+            </a:r>
+            <a:endParaRPr b="0" lang="en-US" sz="1800" spc="-1" strike="noStrike">
+              <a:latin typeface="Arial"/>
+            </a:endParaRPr>
+          </a:p>
+          <a:p>
+            <a:pPr marL="343080" indent="-343080">
               <a:lnSpc>
                 <a:spcPct val="200000"/>
               </a:lnSpc>
-              <a:buFont typeface="+mj-lt"/>
-              <a:buAutoNum type="arabicPeriod" startAt="6"/>
+              <a:buClr>
+                <a:srgbClr val="000000"/>
+              </a:buClr>
+              <a:buFont typeface="Arial"/>
+              <a:buAutoNum type="arabicPeriod"/>
             </a:pPr>
             <a:r>
-              <a:rPr lang="en-IN" sz="1800" b="1" dirty="0"/>
+              <a:rPr b="1" lang="en-IN" sz="1800" spc="-1" strike="noStrike">
+                <a:solidFill>
+                  <a:srgbClr val="000000"/>
+                </a:solidFill>
+                <a:latin typeface="Arial"/>
+                <a:ea typeface="DejaVu Sans"/>
+              </a:rPr>
+              <a:t>What are ROS 2 services? How are they different from topics?</a:t>
+            </a:r>
+            <a:r>
+              <a:rPr b="0" lang="en-IN" sz="1800" spc="-1" strike="noStrike">
+                <a:solidFill>
+                  <a:srgbClr val="000000"/>
+                </a:solidFill>
+                <a:latin typeface="Arial"/>
+                <a:ea typeface="DejaVu Sans"/>
+              </a:rPr>
+              <a:t> </a:t>
+            </a:r>
+            <a:endParaRPr b="0" lang="en-US" sz="1800" spc="-1" strike="noStrike">
+              <a:latin typeface="Arial"/>
+            </a:endParaRPr>
+          </a:p>
+          <a:p>
+            <a:pPr marL="343080" indent="-343080">
+              <a:lnSpc>
+                <a:spcPct val="200000"/>
+              </a:lnSpc>
+              <a:buClr>
+                <a:srgbClr val="000000"/>
+              </a:buClr>
+              <a:buFont typeface="Arial"/>
+              <a:buAutoNum type="arabicPeriod"/>
+            </a:pPr>
+            <a:r>
+              <a:rPr b="1" lang="en-IN" sz="1800" spc="-1" strike="noStrike">
+                <a:solidFill>
+                  <a:srgbClr val="000000"/>
+                </a:solidFill>
+                <a:latin typeface="Arial"/>
+                <a:ea typeface="DejaVu Sans"/>
+              </a:rPr>
+              <a:t>What are ROS 2 actions? Explain where actions are useful in robotics applications.</a:t>
+            </a:r>
+            <a:endParaRPr b="0" lang="en-US" sz="1800" spc="-1" strike="noStrike">
+              <a:latin typeface="Arial"/>
+            </a:endParaRPr>
+          </a:p>
+          <a:p>
+            <a:pPr marL="343080" indent="-343080">
+              <a:lnSpc>
+                <a:spcPct val="200000"/>
+              </a:lnSpc>
+              <a:buClr>
+                <a:srgbClr val="000000"/>
+              </a:buClr>
+              <a:buFont typeface="Arial"/>
+              <a:buAutoNum type="arabicPeriod"/>
+            </a:pPr>
+            <a:r>
+              <a:rPr b="1" lang="en-IN" sz="1800" spc="-1" strike="noStrike">
+                <a:solidFill>
+                  <a:srgbClr val="000000"/>
+                </a:solidFill>
+                <a:latin typeface="Arial"/>
+                <a:ea typeface="DejaVu Sans"/>
+              </a:rPr>
               <a:t>Differentiate between Topics, Services, and Actions in ROS 2.</a:t>
             </a:r>
-            <a:endParaRPr lang="en-IN" sz="1800" dirty="0"/>
+            <a:endParaRPr b="0" lang="en-US" sz="1800" spc="-1" strike="noStrike">
+              <a:latin typeface="Arial"/>
+            </a:endParaRPr>
           </a:p>
         </p:txBody>
       </p:sp>
     </p:spTree>
-    <p:extLst>
-      <p:ext uri="{BB962C8B-B14F-4D97-AF65-F5344CB8AC3E}">
-        <p14:creationId xmlns:p14="http://schemas.microsoft.com/office/powerpoint/2010/main" val="3854679787"/>
-      </p:ext>
-    </p:extLst>
   </p:cSld>
-  <p:clrMapOvr>
-    <a:masterClrMapping/>
-  </p:clrMapOvr>
+  <mc:AlternateContent>
+    <mc:Choice Requires="p14">
+      <p:transition spd="slow" p14:dur="2000"/>
+    </mc:Choice>
+    <mc:Fallback>
+      <p:transition spd="slow"/>
+    </mc:Fallback>
+  </mc:AlternateContent>
 </p:sld>
 </file>
 
@@ -3441,31 +4234,31 @@
         <a:sysClr val="window" lastClr="FFFFFF"/>
       </a:lt1>
       <a:dk2>
-        <a:srgbClr val="1F497D"/>
+        <a:srgbClr val="1f497d"/>
       </a:dk2>
       <a:lt2>
-        <a:srgbClr val="EEECE1"/>
+        <a:srgbClr val="eeece1"/>
       </a:lt2>
       <a:accent1>
-        <a:srgbClr val="4F81BD"/>
+        <a:srgbClr val="4f81bd"/>
       </a:accent1>
       <a:accent2>
-        <a:srgbClr val="C0504D"/>
+        <a:srgbClr val="c0504d"/>
       </a:accent2>
       <a:accent3>
-        <a:srgbClr val="9BBB59"/>
+        <a:srgbClr val="9bbb59"/>
       </a:accent3>
       <a:accent4>
-        <a:srgbClr val="8064A2"/>
+        <a:srgbClr val="8064a2"/>
       </a:accent4>
       <a:accent5>
-        <a:srgbClr val="4BACC6"/>
+        <a:srgbClr val="4bacc6"/>
       </a:accent5>
       <a:accent6>
-        <a:srgbClr val="F79646"/>
+        <a:srgbClr val="f79646"/>
       </a:accent6>
       <a:hlink>
-        <a:srgbClr val="0000FF"/>
+        <a:srgbClr val="0000ff"/>
       </a:hlink>
       <a:folHlink>
         <a:srgbClr val="800080"/>
@@ -3653,7 +4446,5 @@
       </a:bgFillStyleLst>
     </a:fmtScheme>
   </a:themeElements>
-  <a:objectDefaults/>
-  <a:extraClrSchemeLst/>
 </a:theme>
 </file>